--- a/components/diagrams/260623 Integration.pptx
+++ b/components/diagrams/260623 Integration.pptx
@@ -6,8 +6,9 @@
   </p:sldMasterIdLst>
   <p:sldIdLst>
     <p:sldId id="274" r:id="rId2"/>
-    <p:sldId id="277" r:id="rId3"/>
-    <p:sldId id="275" r:id="rId4"/>
+    <p:sldId id="278" r:id="rId3"/>
+    <p:sldId id="277" r:id="rId4"/>
+    <p:sldId id="275" r:id="rId5"/>
   </p:sldIdLst>
   <p:sldSz cx="12192000" cy="6858000"/>
   <p:notesSz cx="6858000" cy="9144000"/>
@@ -1061,7 +1062,7 @@
           <a:p>
             <a:fld id="{96DA8C75-A467-416A-B374-E97E5CF82461}" type="datetimeFigureOut">
               <a:rPr lang="de-DE" smtClean="0"/>
-              <a:t>02.07.2026</a:t>
+              <a:t>07.09.2026</a:t>
             </a:fld>
             <a:endParaRPr lang="de-DE"/>
           </a:p>
@@ -1259,7 +1260,7 @@
           <a:p>
             <a:fld id="{96DA8C75-A467-416A-B374-E97E5CF82461}" type="datetimeFigureOut">
               <a:rPr lang="de-DE" smtClean="0"/>
-              <a:t>02.07.2026</a:t>
+              <a:t>07.09.2026</a:t>
             </a:fld>
             <a:endParaRPr lang="de-DE"/>
           </a:p>
@@ -1467,7 +1468,7 @@
           <a:p>
             <a:fld id="{96DA8C75-A467-416A-B374-E97E5CF82461}" type="datetimeFigureOut">
               <a:rPr lang="de-DE" smtClean="0"/>
-              <a:t>02.07.2026</a:t>
+              <a:t>07.09.2026</a:t>
             </a:fld>
             <a:endParaRPr lang="de-DE"/>
           </a:p>
@@ -1665,7 +1666,7 @@
           <a:p>
             <a:fld id="{96DA8C75-A467-416A-B374-E97E5CF82461}" type="datetimeFigureOut">
               <a:rPr lang="de-DE" smtClean="0"/>
-              <a:t>02.07.2026</a:t>
+              <a:t>07.09.2026</a:t>
             </a:fld>
             <a:endParaRPr lang="de-DE"/>
           </a:p>
@@ -1940,7 +1941,7 @@
           <a:p>
             <a:fld id="{96DA8C75-A467-416A-B374-E97E5CF82461}" type="datetimeFigureOut">
               <a:rPr lang="de-DE" smtClean="0"/>
-              <a:t>02.07.2026</a:t>
+              <a:t>07.09.2026</a:t>
             </a:fld>
             <a:endParaRPr lang="de-DE"/>
           </a:p>
@@ -2205,7 +2206,7 @@
           <a:p>
             <a:fld id="{96DA8C75-A467-416A-B374-E97E5CF82461}" type="datetimeFigureOut">
               <a:rPr lang="de-DE" smtClean="0"/>
-              <a:t>02.07.2026</a:t>
+              <a:t>07.09.2026</a:t>
             </a:fld>
             <a:endParaRPr lang="de-DE"/>
           </a:p>
@@ -2617,7 +2618,7 @@
           <a:p>
             <a:fld id="{96DA8C75-A467-416A-B374-E97E5CF82461}" type="datetimeFigureOut">
               <a:rPr lang="de-DE" smtClean="0"/>
-              <a:t>02.07.2026</a:t>
+              <a:t>07.09.2026</a:t>
             </a:fld>
             <a:endParaRPr lang="de-DE"/>
           </a:p>
@@ -2758,7 +2759,7 @@
           <a:p>
             <a:fld id="{96DA8C75-A467-416A-B374-E97E5CF82461}" type="datetimeFigureOut">
               <a:rPr lang="de-DE" smtClean="0"/>
-              <a:t>02.07.2026</a:t>
+              <a:t>07.09.2026</a:t>
             </a:fld>
             <a:endParaRPr lang="de-DE"/>
           </a:p>
@@ -2871,7 +2872,7 @@
           <a:p>
             <a:fld id="{96DA8C75-A467-416A-B374-E97E5CF82461}" type="datetimeFigureOut">
               <a:rPr lang="de-DE" smtClean="0"/>
-              <a:t>02.07.2026</a:t>
+              <a:t>07.09.2026</a:t>
             </a:fld>
             <a:endParaRPr lang="de-DE"/>
           </a:p>
@@ -3182,7 +3183,7 @@
           <a:p>
             <a:fld id="{96DA8C75-A467-416A-B374-E97E5CF82461}" type="datetimeFigureOut">
               <a:rPr lang="de-DE" smtClean="0"/>
-              <a:t>02.07.2026</a:t>
+              <a:t>07.09.2026</a:t>
             </a:fld>
             <a:endParaRPr lang="de-DE"/>
           </a:p>
@@ -3470,7 +3471,7 @@
           <a:p>
             <a:fld id="{96DA8C75-A467-416A-B374-E97E5CF82461}" type="datetimeFigureOut">
               <a:rPr lang="de-DE" smtClean="0"/>
-              <a:t>02.07.2026</a:t>
+              <a:t>07.09.2026</a:t>
             </a:fld>
             <a:endParaRPr lang="de-DE"/>
           </a:p>
@@ -3714,7 +3715,7 @@
           <a:p>
             <a:fld id="{96DA8C75-A467-416A-B374-E97E5CF82461}" type="datetimeFigureOut">
               <a:rPr lang="de-DE" smtClean="0"/>
-              <a:t>02.07.2026</a:t>
+              <a:t>07.09.2026</a:t>
             </a:fld>
             <a:endParaRPr lang="de-DE"/>
           </a:p>
@@ -4932,10 +4933,10 @@
       </p:grpSpPr>
       <p:sp>
         <p:nvSpPr>
-          <p:cNvPr id="66" name="Ellipse 65">
-            <a:extLst>
-              <a:ext uri="{FF2B5EF4-FFF2-40B4-BE49-F238E27FC236}">
-                <a16:creationId xmlns:a16="http://schemas.microsoft.com/office/drawing/2014/main" id="{77537B90-9C30-A0F7-668C-BA3621D1E7DC}"/>
+          <p:cNvPr id="1102" name="Rechteck: abgerundete Ecken 1101">
+            <a:extLst>
+              <a:ext uri="{FF2B5EF4-FFF2-40B4-BE49-F238E27FC236}">
+                <a16:creationId xmlns:a16="http://schemas.microsoft.com/office/drawing/2014/main" id="{1A61B044-3307-893E-BB2E-DA6D851C9CD9}"/>
               </a:ext>
             </a:extLst>
           </p:cNvPr>
@@ -4944,20 +4945,23 @@
         </p:nvSpPr>
         <p:spPr>
           <a:xfrm>
-            <a:off x="9341840" y="5219128"/>
-            <a:ext cx="2584249" cy="1454292"/>
+            <a:off x="8610929" y="109856"/>
+            <a:ext cx="2737863" cy="1998066"/>
           </a:xfrm>
-          <a:prstGeom prst="ellipse">
+          <a:prstGeom prst="roundRect">
             <a:avLst/>
           </a:prstGeom>
           <a:solidFill>
-            <a:srgbClr val="FFE48F"/>
+            <a:srgbClr val="D6A300">
+              <a:alpha val="34000"/>
+            </a:srgbClr>
           </a:solidFill>
-          <a:ln w="38100">
-            <a:solidFill>
-              <a:srgbClr val="FFC000"/>
-            </a:solidFill>
+          <a:ln>
+            <a:noFill/>
           </a:ln>
+          <a:effectLst>
+            <a:softEdge rad="31750"/>
+          </a:effectLst>
         </p:spPr>
         <p:style>
           <a:lnRef idx="2">
@@ -4980,98 +4984,16 @@
           <a:lstStyle/>
           <a:p>
             <a:pPr algn="ctr"/>
-            <a:r>
-              <a:rPr lang="de-DE" sz="1200" dirty="0" err="1">
-                <a:solidFill>
-                  <a:srgbClr val="AC8300"/>
-                </a:solidFill>
-              </a:rPr>
-              <a:t>OpenDayLight</a:t>
-            </a:r>
-            <a:endParaRPr lang="de-DE" sz="1200" dirty="0">
-              <a:solidFill>
-                <a:srgbClr val="AC8300"/>
-              </a:solidFill>
-            </a:endParaRPr>
-          </a:p>
-          <a:p>
-            <a:pPr algn="ctr"/>
-            <a:endParaRPr lang="de-DE" sz="1200" dirty="0">
-              <a:solidFill>
-                <a:srgbClr val="D6A300"/>
-              </a:solidFill>
-            </a:endParaRPr>
-          </a:p>
-          <a:p>
-            <a:pPr algn="ctr"/>
-            <a:endParaRPr lang="de-DE" sz="1200" dirty="0">
-              <a:solidFill>
-                <a:srgbClr val="D6A300"/>
-              </a:solidFill>
-            </a:endParaRPr>
-          </a:p>
-          <a:p>
-            <a:pPr algn="ctr"/>
-            <a:endParaRPr lang="de-DE" sz="1200" dirty="0">
-              <a:solidFill>
-                <a:srgbClr val="D6A300"/>
-              </a:solidFill>
-            </a:endParaRPr>
-          </a:p>
-          <a:p>
-            <a:pPr algn="ctr"/>
-            <a:endParaRPr lang="de-DE" sz="1200" dirty="0">
-              <a:solidFill>
-                <a:srgbClr val="D6A300"/>
-              </a:solidFill>
-            </a:endParaRPr>
-          </a:p>
-          <a:p>
-            <a:pPr algn="ctr"/>
-            <a:endParaRPr lang="de-DE" sz="1200" dirty="0">
-              <a:solidFill>
-                <a:srgbClr val="D6A300"/>
-              </a:solidFill>
-            </a:endParaRPr>
+            <a:endParaRPr lang="de-DE"/>
           </a:p>
         </p:txBody>
       </p:sp>
-      <p:pic>
-        <p:nvPicPr>
-          <p:cNvPr id="1045" name="Grafik 1044">
-            <a:extLst>
-              <a:ext uri="{FF2B5EF4-FFF2-40B4-BE49-F238E27FC236}">
-                <a16:creationId xmlns:a16="http://schemas.microsoft.com/office/drawing/2014/main" id="{CE92FA6D-19EF-5509-14D1-60039A2E8A37}"/>
-              </a:ext>
-            </a:extLst>
-          </p:cNvPr>
-          <p:cNvPicPr>
-            <a:picLocks noChangeAspect="1"/>
-          </p:cNvPicPr>
-          <p:nvPr/>
-        </p:nvPicPr>
-        <p:blipFill>
-          <a:blip r:embed="rId2"/>
-          <a:stretch>
-            <a:fillRect/>
-          </a:stretch>
-        </p:blipFill>
-        <p:spPr>
-          <a:xfrm>
-            <a:off x="1326055" y="4167687"/>
-            <a:ext cx="542453" cy="523080"/>
-          </a:xfrm>
-          <a:prstGeom prst="rect">
-            <a:avLst/>
-          </a:prstGeom>
-        </p:spPr>
-      </p:pic>
       <p:sp>
         <p:nvSpPr>
-          <p:cNvPr id="1102" name="Rechteck: abgerundete Ecken 1101">
-            <a:extLst>
-              <a:ext uri="{FF2B5EF4-FFF2-40B4-BE49-F238E27FC236}">
-                <a16:creationId xmlns:a16="http://schemas.microsoft.com/office/drawing/2014/main" id="{1A61B044-3307-893E-BB2E-DA6D851C9CD9}"/>
+          <p:cNvPr id="1099" name="Rechteck: abgerundete Ecken 1098">
+            <a:extLst>
+              <a:ext uri="{FF2B5EF4-FFF2-40B4-BE49-F238E27FC236}">
+                <a16:creationId xmlns:a16="http://schemas.microsoft.com/office/drawing/2014/main" id="{C41FD093-A98A-FC40-1EA5-CA5160E4F39E}"/>
               </a:ext>
             </a:extLst>
           </p:cNvPr>
@@ -5080,8 +5002,8 @@
         </p:nvSpPr>
         <p:spPr>
           <a:xfrm>
-            <a:off x="8610930" y="352784"/>
-            <a:ext cx="2633922" cy="1755138"/>
+            <a:off x="191220" y="3865650"/>
+            <a:ext cx="3341321" cy="2360502"/>
           </a:xfrm>
           <a:prstGeom prst="roundRect">
             <a:avLst/>
@@ -5239,10 +5161,10 @@
       </p:sp>
       <p:sp>
         <p:nvSpPr>
-          <p:cNvPr id="1099" name="Rechteck: abgerundete Ecken 1098">
-            <a:extLst>
-              <a:ext uri="{FF2B5EF4-FFF2-40B4-BE49-F238E27FC236}">
-                <a16:creationId xmlns:a16="http://schemas.microsoft.com/office/drawing/2014/main" id="{C41FD093-A98A-FC40-1EA5-CA5160E4F39E}"/>
+          <p:cNvPr id="66" name="Ellipse 65">
+            <a:extLst>
+              <a:ext uri="{FF2B5EF4-FFF2-40B4-BE49-F238E27FC236}">
+                <a16:creationId xmlns:a16="http://schemas.microsoft.com/office/drawing/2014/main" id="{77537B90-9C30-A0F7-668C-BA3621D1E7DC}"/>
               </a:ext>
             </a:extLst>
           </p:cNvPr>
@@ -5251,23 +5173,20 @@
         </p:nvSpPr>
         <p:spPr>
           <a:xfrm>
-            <a:off x="196482" y="3997738"/>
-            <a:ext cx="3341321" cy="2591986"/>
+            <a:off x="9373078" y="4771860"/>
+            <a:ext cx="2584249" cy="1454292"/>
           </a:xfrm>
-          <a:prstGeom prst="roundRect">
+          <a:prstGeom prst="ellipse">
             <a:avLst/>
           </a:prstGeom>
           <a:solidFill>
-            <a:srgbClr val="D6A300">
-              <a:alpha val="34000"/>
-            </a:srgbClr>
+            <a:srgbClr val="FFE48F"/>
           </a:solidFill>
-          <a:ln>
-            <a:noFill/>
+          <a:ln w="38100">
+            <a:solidFill>
+              <a:srgbClr val="FFC000"/>
+            </a:solidFill>
           </a:ln>
-          <a:effectLst>
-            <a:softEdge rad="31750"/>
-          </a:effectLst>
         </p:spPr>
         <p:style>
           <a:lnRef idx="2">
@@ -5290,7 +5209,59 @@
           <a:lstStyle/>
           <a:p>
             <a:pPr algn="ctr"/>
-            <a:endParaRPr lang="de-DE"/>
+            <a:r>
+              <a:rPr lang="de-DE" sz="1200" dirty="0" err="1">
+                <a:solidFill>
+                  <a:srgbClr val="AC8300"/>
+                </a:solidFill>
+              </a:rPr>
+              <a:t>OpenDayLight</a:t>
+            </a:r>
+            <a:endParaRPr lang="de-DE" sz="1200" dirty="0">
+              <a:solidFill>
+                <a:srgbClr val="AC8300"/>
+              </a:solidFill>
+            </a:endParaRPr>
+          </a:p>
+          <a:p>
+            <a:pPr algn="ctr"/>
+            <a:endParaRPr lang="de-DE" sz="1200" dirty="0">
+              <a:solidFill>
+                <a:srgbClr val="D6A300"/>
+              </a:solidFill>
+            </a:endParaRPr>
+          </a:p>
+          <a:p>
+            <a:pPr algn="ctr"/>
+            <a:endParaRPr lang="de-DE" sz="1200" dirty="0">
+              <a:solidFill>
+                <a:srgbClr val="D6A300"/>
+              </a:solidFill>
+            </a:endParaRPr>
+          </a:p>
+          <a:p>
+            <a:pPr algn="ctr"/>
+            <a:endParaRPr lang="de-DE" sz="1200" dirty="0">
+              <a:solidFill>
+                <a:srgbClr val="D6A300"/>
+              </a:solidFill>
+            </a:endParaRPr>
+          </a:p>
+          <a:p>
+            <a:pPr algn="ctr"/>
+            <a:endParaRPr lang="de-DE" sz="1200" dirty="0">
+              <a:solidFill>
+                <a:srgbClr val="D6A300"/>
+              </a:solidFill>
+            </a:endParaRPr>
+          </a:p>
+          <a:p>
+            <a:pPr algn="ctr"/>
+            <a:endParaRPr lang="de-DE" sz="1200" dirty="0">
+              <a:solidFill>
+                <a:srgbClr val="D6A300"/>
+              </a:solidFill>
+            </a:endParaRPr>
           </a:p>
         </p:txBody>
       </p:sp>
@@ -5308,7 +5279,7 @@
         </p:nvSpPr>
         <p:spPr>
           <a:xfrm>
-            <a:off x="9341838" y="4706266"/>
+            <a:off x="9373076" y="4243490"/>
             <a:ext cx="2584249" cy="232349"/>
           </a:xfrm>
           <a:prstGeom prst="roundRect">
@@ -5341,6 +5312,9 @@
             <a:tileRect/>
           </a:gradFill>
           <a:ln w="6350"/>
+          <a:effectLst>
+            <a:softEdge rad="12700"/>
+          </a:effectLst>
         </p:spPr>
         <p:style>
           <a:lnRef idx="2">
@@ -5364,16 +5338,16 @@
           <a:p>
             <a:pPr algn="ctr"/>
             <a:r>
-              <a:rPr lang="de-DE" sz="1050" dirty="0" err="1">
+              <a:rPr lang="de-DE" sz="1200" dirty="0" err="1">
                 <a:solidFill>
-                  <a:srgbClr val="0C3548"/>
+                  <a:schemeClr val="accent1"/>
                 </a:solidFill>
               </a:rPr>
               <a:t>MicroWaveDeviceInventory</a:t>
             </a:r>
-            <a:endParaRPr lang="de-DE" sz="1050" dirty="0">
+            <a:endParaRPr lang="de-DE" sz="1200" dirty="0">
               <a:solidFill>
-                <a:srgbClr val="0C3548"/>
+                <a:schemeClr val="accent1"/>
               </a:solidFill>
             </a:endParaRPr>
           </a:p>
@@ -5426,6 +5400,9 @@
             <a:tileRect/>
           </a:gradFill>
           <a:ln w="6350"/>
+          <a:effectLst>
+            <a:softEdge rad="31750"/>
+          </a:effectLst>
         </p:spPr>
         <p:style>
           <a:lnRef idx="2">
@@ -6319,6 +6296,3419 @@
         </p:nvSpPr>
         <p:spPr>
           <a:xfrm>
+            <a:off x="9566874" y="5265350"/>
+            <a:ext cx="2274936" cy="774700"/>
+          </a:xfrm>
+          <a:prstGeom prst="cloudCallout">
+            <a:avLst>
+              <a:gd name="adj1" fmla="val 48056"/>
+              <a:gd name="adj2" fmla="val 10041"/>
+            </a:avLst>
+          </a:prstGeom>
+          <a:gradFill flip="none" rotWithShape="1">
+            <a:gsLst>
+              <a:gs pos="0">
+                <a:schemeClr val="accent4">
+                  <a:lumMod val="40000"/>
+                  <a:lumOff val="60000"/>
+                </a:schemeClr>
+              </a:gs>
+              <a:gs pos="46000">
+                <a:schemeClr val="accent4">
+                  <a:lumMod val="95000"/>
+                  <a:lumOff val="5000"/>
+                </a:schemeClr>
+              </a:gs>
+              <a:gs pos="100000">
+                <a:schemeClr val="accent1">
+                  <a:lumMod val="40000"/>
+                  <a:lumOff val="60000"/>
+                </a:schemeClr>
+              </a:gs>
+            </a:gsLst>
+            <a:path path="circle">
+              <a:fillToRect l="50000" t="130000" r="50000" b="-30000"/>
+            </a:path>
+            <a:tileRect/>
+          </a:gradFill>
+          <a:ln w="6350">
+            <a:noFill/>
+          </a:ln>
+          <a:effectLst>
+            <a:softEdge rad="31750"/>
+          </a:effectLst>
+        </p:spPr>
+        <p:style>
+          <a:lnRef idx="2">
+            <a:schemeClr val="accent1">
+              <a:shade val="15000"/>
+            </a:schemeClr>
+          </a:lnRef>
+          <a:fillRef idx="1">
+            <a:schemeClr val="accent1"/>
+          </a:fillRef>
+          <a:effectRef idx="0">
+            <a:schemeClr val="accent1"/>
+          </a:effectRef>
+          <a:fontRef idx="minor">
+            <a:schemeClr val="lt1"/>
+          </a:fontRef>
+        </p:style>
+        <p:txBody>
+          <a:bodyPr rtlCol="0" anchor="ctr"/>
+          <a:lstStyle/>
+          <a:p>
+            <a:pPr algn="ctr"/>
+            <a:r>
+              <a:rPr lang="de-DE" sz="1050" dirty="0">
+                <a:solidFill>
+                  <a:srgbClr val="0C3548"/>
+                </a:solidFill>
+              </a:rPr>
+              <a:t>Devices</a:t>
+            </a:r>
+          </a:p>
+        </p:txBody>
+      </p:sp>
+      <p:cxnSp>
+        <p:nvCxnSpPr>
+          <p:cNvPr id="68" name="Verbinder: gekrümmt 67">
+            <a:extLst>
+              <a:ext uri="{FF2B5EF4-FFF2-40B4-BE49-F238E27FC236}">
+                <a16:creationId xmlns:a16="http://schemas.microsoft.com/office/drawing/2014/main" id="{75A94349-AD26-46EE-76A3-D78F8BD1D030}"/>
+              </a:ext>
+            </a:extLst>
+          </p:cNvPr>
+          <p:cNvCxnSpPr>
+            <a:stCxn id="4" idx="3"/>
+            <a:endCxn id="66" idx="2"/>
+          </p:cNvCxnSpPr>
+          <p:nvPr/>
+        </p:nvCxnSpPr>
+        <p:spPr>
+          <a:xfrm>
+            <a:off x="8634964" y="5279894"/>
+            <a:ext cx="738114" cy="219112"/>
+          </a:xfrm>
+          <a:prstGeom prst="curvedConnector3">
+            <a:avLst/>
+          </a:prstGeom>
+          <a:ln>
+            <a:tailEnd type="triangle"/>
+          </a:ln>
+        </p:spPr>
+        <p:style>
+          <a:lnRef idx="2">
+            <a:schemeClr val="accent1"/>
+          </a:lnRef>
+          <a:fillRef idx="0">
+            <a:schemeClr val="accent1"/>
+          </a:fillRef>
+          <a:effectRef idx="1">
+            <a:schemeClr val="accent1"/>
+          </a:effectRef>
+          <a:fontRef idx="minor">
+            <a:schemeClr val="tx1"/>
+          </a:fontRef>
+        </p:style>
+      </p:cxnSp>
+      <p:cxnSp>
+        <p:nvCxnSpPr>
+          <p:cNvPr id="70" name="Verbinder: gekrümmt 69">
+            <a:extLst>
+              <a:ext uri="{FF2B5EF4-FFF2-40B4-BE49-F238E27FC236}">
+                <a16:creationId xmlns:a16="http://schemas.microsoft.com/office/drawing/2014/main" id="{BE6540EA-A0B0-9DAE-B9AF-F0427D912814}"/>
+              </a:ext>
+            </a:extLst>
+          </p:cNvPr>
+          <p:cNvCxnSpPr>
+            <a:cxnSpLocks/>
+            <a:stCxn id="83" idx="0"/>
+            <a:endCxn id="5" idx="3"/>
+          </p:cNvCxnSpPr>
+          <p:nvPr/>
+        </p:nvCxnSpPr>
+        <p:spPr>
+          <a:xfrm rot="16200000" flipH="1" flipV="1">
+            <a:off x="9627478" y="3381143"/>
+            <a:ext cx="175376" cy="1900070"/>
+          </a:xfrm>
+          <a:prstGeom prst="curvedConnector4">
+            <a:avLst>
+              <a:gd name="adj1" fmla="val -130349"/>
+              <a:gd name="adj2" fmla="val 84002"/>
+            </a:avLst>
+          </a:prstGeom>
+          <a:ln>
+            <a:tailEnd type="triangle"/>
+          </a:ln>
+        </p:spPr>
+        <p:style>
+          <a:lnRef idx="2">
+            <a:schemeClr val="accent1"/>
+          </a:lnRef>
+          <a:fillRef idx="0">
+            <a:schemeClr val="accent1"/>
+          </a:fillRef>
+          <a:effectRef idx="1">
+            <a:schemeClr val="accent1"/>
+          </a:effectRef>
+          <a:fontRef idx="minor">
+            <a:schemeClr val="tx1"/>
+          </a:fontRef>
+        </p:style>
+      </p:cxnSp>
+      <p:cxnSp>
+        <p:nvCxnSpPr>
+          <p:cNvPr id="73" name="Verbinder: gekrümmt 72">
+            <a:extLst>
+              <a:ext uri="{FF2B5EF4-FFF2-40B4-BE49-F238E27FC236}">
+                <a16:creationId xmlns:a16="http://schemas.microsoft.com/office/drawing/2014/main" id="{FF423A63-9319-BBBC-D825-1196E6D06FDA}"/>
+              </a:ext>
+            </a:extLst>
+          </p:cNvPr>
+          <p:cNvCxnSpPr>
+            <a:cxnSpLocks/>
+            <a:stCxn id="66" idx="7"/>
+            <a:endCxn id="83" idx="2"/>
+          </p:cNvCxnSpPr>
+          <p:nvPr/>
+        </p:nvCxnSpPr>
+        <p:spPr>
+          <a:xfrm rot="16200000" flipV="1">
+            <a:off x="10867539" y="4273502"/>
+            <a:ext cx="508997" cy="913671"/>
+          </a:xfrm>
+          <a:prstGeom prst="curvedConnector3">
+            <a:avLst>
+              <a:gd name="adj1" fmla="val 50000"/>
+            </a:avLst>
+          </a:prstGeom>
+          <a:ln>
+            <a:tailEnd type="triangle"/>
+          </a:ln>
+        </p:spPr>
+        <p:style>
+          <a:lnRef idx="2">
+            <a:schemeClr val="accent1"/>
+          </a:lnRef>
+          <a:fillRef idx="0">
+            <a:schemeClr val="accent1"/>
+          </a:fillRef>
+          <a:effectRef idx="1">
+            <a:schemeClr val="accent1"/>
+          </a:effectRef>
+          <a:fontRef idx="minor">
+            <a:schemeClr val="tx1"/>
+          </a:fontRef>
+        </p:style>
+      </p:cxnSp>
+      <p:grpSp>
+        <p:nvGrpSpPr>
+          <p:cNvPr id="99" name="Gruppieren 98">
+            <a:extLst>
+              <a:ext uri="{FF2B5EF4-FFF2-40B4-BE49-F238E27FC236}">
+                <a16:creationId xmlns:a16="http://schemas.microsoft.com/office/drawing/2014/main" id="{F0F7E189-F329-3636-A192-03DD51F901ED}"/>
+              </a:ext>
+            </a:extLst>
+          </p:cNvPr>
+          <p:cNvGrpSpPr/>
+          <p:nvPr/>
+        </p:nvGrpSpPr>
+        <p:grpSpPr>
+          <a:xfrm>
+            <a:off x="294005" y="325232"/>
+            <a:ext cx="657427" cy="849143"/>
+            <a:chOff x="294005" y="325232"/>
+            <a:chExt cx="657427" cy="849143"/>
+          </a:xfrm>
+        </p:grpSpPr>
+        <p:pic>
+          <p:nvPicPr>
+            <p:cNvPr id="86" name="Grafik 85" descr="Männliches Profil Silhouette">
+              <a:extLst>
+                <a:ext uri="{FF2B5EF4-FFF2-40B4-BE49-F238E27FC236}">
+                  <a16:creationId xmlns:a16="http://schemas.microsoft.com/office/drawing/2014/main" id="{1E3554DD-0E9C-E3E7-C115-15D38F6B2CC7}"/>
+                </a:ext>
+              </a:extLst>
+            </p:cNvPr>
+            <p:cNvPicPr>
+              <a:picLocks noChangeAspect="1"/>
+            </p:cNvPicPr>
+            <p:nvPr/>
+          </p:nvPicPr>
+          <p:blipFill>
+            <a:blip>
+              <a:extLst>
+                <a:ext uri="{96DAC541-7B7A-43D3-8B79-37D633B846F1}">
+                  <asvg:svgBlip xmlns:asvg="http://schemas.microsoft.com/office/drawing/2016/SVG/main" r:embed="rId2"/>
+                </a:ext>
+              </a:extLst>
+            </a:blip>
+            <a:stretch>
+              <a:fillRect/>
+            </a:stretch>
+          </p:blipFill>
+          <p:spPr>
+            <a:xfrm>
+              <a:off x="294005" y="325232"/>
+              <a:ext cx="657427" cy="657427"/>
+            </a:xfrm>
+            <a:prstGeom prst="rect">
+              <a:avLst/>
+            </a:prstGeom>
+          </p:spPr>
+        </p:pic>
+        <p:sp>
+          <p:nvSpPr>
+            <p:cNvPr id="88" name="Textfeld 87">
+              <a:extLst>
+                <a:ext uri="{FF2B5EF4-FFF2-40B4-BE49-F238E27FC236}">
+                  <a16:creationId xmlns:a16="http://schemas.microsoft.com/office/drawing/2014/main" id="{8FAAE994-2252-948B-4BA8-5494C22FFE29}"/>
+                </a:ext>
+              </a:extLst>
+            </p:cNvPr>
+            <p:cNvSpPr txBox="1"/>
+            <p:nvPr/>
+          </p:nvSpPr>
+          <p:spPr>
+            <a:xfrm>
+              <a:off x="383258" y="897376"/>
+              <a:ext cx="476556" cy="276999"/>
+            </a:xfrm>
+            <a:prstGeom prst="rect">
+              <a:avLst/>
+            </a:prstGeom>
+            <a:noFill/>
+          </p:spPr>
+          <p:txBody>
+            <a:bodyPr wrap="square" lIns="0" tIns="0" rIns="0" bIns="0" rtlCol="0">
+              <a:spAutoFit/>
+            </a:bodyPr>
+            <a:lstStyle/>
+            <a:p>
+              <a:pPr algn="ctr"/>
+              <a:r>
+                <a:rPr lang="de-DE" sz="900" dirty="0"/>
+                <a:t>Transport</a:t>
+              </a:r>
+            </a:p>
+            <a:p>
+              <a:pPr algn="ctr"/>
+              <a:r>
+                <a:rPr lang="de-DE" sz="900" dirty="0" err="1"/>
+                <a:t>Planning</a:t>
+              </a:r>
+              <a:endParaRPr lang="de-DE" sz="900" dirty="0"/>
+            </a:p>
+          </p:txBody>
+        </p:sp>
+      </p:grpSp>
+      <p:grpSp>
+        <p:nvGrpSpPr>
+          <p:cNvPr id="100" name="Gruppieren 99">
+            <a:extLst>
+              <a:ext uri="{FF2B5EF4-FFF2-40B4-BE49-F238E27FC236}">
+                <a16:creationId xmlns:a16="http://schemas.microsoft.com/office/drawing/2014/main" id="{B02E03FC-7C27-142F-C74E-2B6F217EA52C}"/>
+              </a:ext>
+            </a:extLst>
+          </p:cNvPr>
+          <p:cNvGrpSpPr/>
+          <p:nvPr/>
+        </p:nvGrpSpPr>
+        <p:grpSpPr>
+          <a:xfrm>
+            <a:off x="334285" y="4632609"/>
+            <a:ext cx="657427" cy="698813"/>
+            <a:chOff x="288722" y="3938144"/>
+            <a:chExt cx="657427" cy="698813"/>
+          </a:xfrm>
+        </p:grpSpPr>
+        <p:pic>
+          <p:nvPicPr>
+            <p:cNvPr id="87" name="Grafik 86" descr="Männliches Profil Silhouette">
+              <a:extLst>
+                <a:ext uri="{FF2B5EF4-FFF2-40B4-BE49-F238E27FC236}">
+                  <a16:creationId xmlns:a16="http://schemas.microsoft.com/office/drawing/2014/main" id="{881E8D73-A10F-E535-74A4-CF51C20F4EA8}"/>
+                </a:ext>
+              </a:extLst>
+            </p:cNvPr>
+            <p:cNvPicPr>
+              <a:picLocks noChangeAspect="1"/>
+            </p:cNvPicPr>
+            <p:nvPr/>
+          </p:nvPicPr>
+          <p:blipFill>
+            <a:blip>
+              <a:extLst>
+                <a:ext uri="{96DAC541-7B7A-43D3-8B79-37D633B846F1}">
+                  <asvg:svgBlip xmlns:asvg="http://schemas.microsoft.com/office/drawing/2016/SVG/main" r:embed="rId2"/>
+                </a:ext>
+              </a:extLst>
+            </a:blip>
+            <a:stretch>
+              <a:fillRect/>
+            </a:stretch>
+          </p:blipFill>
+          <p:spPr>
+            <a:xfrm>
+              <a:off x="288722" y="3938144"/>
+              <a:ext cx="657427" cy="657427"/>
+            </a:xfrm>
+            <a:prstGeom prst="rect">
+              <a:avLst/>
+            </a:prstGeom>
+          </p:spPr>
+        </p:pic>
+        <p:sp>
+          <p:nvSpPr>
+            <p:cNvPr id="89" name="Textfeld 88">
+              <a:extLst>
+                <a:ext uri="{FF2B5EF4-FFF2-40B4-BE49-F238E27FC236}">
+                  <a16:creationId xmlns:a16="http://schemas.microsoft.com/office/drawing/2014/main" id="{F6B23B9D-A613-E9C2-1D7E-BA17ABA08EA5}"/>
+                </a:ext>
+              </a:extLst>
+            </p:cNvPr>
+            <p:cNvSpPr txBox="1"/>
+            <p:nvPr/>
+          </p:nvSpPr>
+          <p:spPr>
+            <a:xfrm>
+              <a:off x="316031" y="4498458"/>
+              <a:ext cx="605936" cy="138499"/>
+            </a:xfrm>
+            <a:prstGeom prst="rect">
+              <a:avLst/>
+            </a:prstGeom>
+            <a:noFill/>
+          </p:spPr>
+          <p:txBody>
+            <a:bodyPr wrap="square" lIns="0" tIns="0" rIns="0" bIns="0" rtlCol="0">
+              <a:spAutoFit/>
+            </a:bodyPr>
+            <a:lstStyle/>
+            <a:p>
+              <a:r>
+                <a:rPr lang="de-DE" sz="900" dirty="0"/>
+                <a:t>Engineering</a:t>
+              </a:r>
+            </a:p>
+          </p:txBody>
+        </p:sp>
+      </p:grpSp>
+      <p:cxnSp>
+        <p:nvCxnSpPr>
+          <p:cNvPr id="91" name="Gerader Verbinder 90">
+            <a:extLst>
+              <a:ext uri="{FF2B5EF4-FFF2-40B4-BE49-F238E27FC236}">
+                <a16:creationId xmlns:a16="http://schemas.microsoft.com/office/drawing/2014/main" id="{5A80FC72-2D19-65F4-9A4F-EDB48E89923D}"/>
+              </a:ext>
+            </a:extLst>
+          </p:cNvPr>
+          <p:cNvCxnSpPr/>
+          <p:nvPr/>
+        </p:nvCxnSpPr>
+        <p:spPr>
+          <a:xfrm>
+            <a:off x="336000" y="2244725"/>
+            <a:ext cx="11520000" cy="0"/>
+          </a:xfrm>
+          <a:prstGeom prst="line">
+            <a:avLst/>
+          </a:prstGeom>
+          <a:ln w="63500">
+            <a:solidFill>
+              <a:schemeClr val="bg1">
+                <a:lumMod val="85000"/>
+              </a:schemeClr>
+            </a:solidFill>
+            <a:prstDash val="dash"/>
+          </a:ln>
+        </p:spPr>
+        <p:style>
+          <a:lnRef idx="2">
+            <a:schemeClr val="accent1"/>
+          </a:lnRef>
+          <a:fillRef idx="0">
+            <a:schemeClr val="accent1"/>
+          </a:fillRef>
+          <a:effectRef idx="1">
+            <a:schemeClr val="accent1"/>
+          </a:effectRef>
+          <a:fontRef idx="minor">
+            <a:schemeClr val="tx1"/>
+          </a:fontRef>
+        </p:style>
+      </p:cxnSp>
+      <p:sp>
+        <p:nvSpPr>
+          <p:cNvPr id="92" name="Textfeld 91">
+            <a:extLst>
+              <a:ext uri="{FF2B5EF4-FFF2-40B4-BE49-F238E27FC236}">
+                <a16:creationId xmlns:a16="http://schemas.microsoft.com/office/drawing/2014/main" id="{311EEF4F-43D9-43BC-84F6-910442BDCEB8}"/>
+              </a:ext>
+            </a:extLst>
+          </p:cNvPr>
+          <p:cNvSpPr txBox="1"/>
+          <p:nvPr/>
+        </p:nvSpPr>
+        <p:spPr>
+          <a:xfrm>
+            <a:off x="9952386" y="2316024"/>
+            <a:ext cx="1803405" cy="246221"/>
+          </a:xfrm>
+          <a:prstGeom prst="rect">
+            <a:avLst/>
+          </a:prstGeom>
+          <a:noFill/>
+        </p:spPr>
+        <p:txBody>
+          <a:bodyPr wrap="square" lIns="0" tIns="0" rIns="0" bIns="0" rtlCol="0">
+            <a:spAutoFit/>
+          </a:bodyPr>
+          <a:lstStyle/>
+          <a:p>
+            <a:pPr algn="r"/>
+            <a:r>
+              <a:rPr lang="de-DE" sz="1600" dirty="0">
+                <a:solidFill>
+                  <a:schemeClr val="bg1">
+                    <a:lumMod val="75000"/>
+                  </a:schemeClr>
+                </a:solidFill>
+              </a:rPr>
+              <a:t>MW SDN Domaine</a:t>
+            </a:r>
+          </a:p>
+        </p:txBody>
+      </p:sp>
+      <p:sp>
+        <p:nvSpPr>
+          <p:cNvPr id="93" name="Rechteck: abgerundete Ecken 92">
+            <a:extLst>
+              <a:ext uri="{FF2B5EF4-FFF2-40B4-BE49-F238E27FC236}">
+                <a16:creationId xmlns:a16="http://schemas.microsoft.com/office/drawing/2014/main" id="{EFDA194D-E555-6573-51FB-D9C4A269C16B}"/>
+              </a:ext>
+            </a:extLst>
+          </p:cNvPr>
+          <p:cNvSpPr/>
+          <p:nvPr/>
+        </p:nvSpPr>
+        <p:spPr>
+          <a:xfrm>
+            <a:off x="1975616" y="351419"/>
+            <a:ext cx="1213293" cy="785064"/>
+          </a:xfrm>
+          <a:prstGeom prst="roundRect">
+            <a:avLst/>
+          </a:prstGeom>
+          <a:gradFill flip="none" rotWithShape="1">
+            <a:gsLst>
+              <a:gs pos="0">
+                <a:schemeClr val="accent5">
+                  <a:lumMod val="40000"/>
+                  <a:lumOff val="60000"/>
+                  <a:alpha val="20000"/>
+                </a:schemeClr>
+              </a:gs>
+              <a:gs pos="46000">
+                <a:schemeClr val="accent5">
+                  <a:lumMod val="95000"/>
+                  <a:lumOff val="5000"/>
+                  <a:alpha val="20000"/>
+                </a:schemeClr>
+              </a:gs>
+              <a:gs pos="100000">
+                <a:schemeClr val="accent5">
+                  <a:lumMod val="60000"/>
+                  <a:alpha val="20000"/>
+                </a:schemeClr>
+              </a:gs>
+            </a:gsLst>
+            <a:path path="circle">
+              <a:fillToRect l="50000" t="130000" r="50000" b="-30000"/>
+            </a:path>
+            <a:tileRect/>
+          </a:gradFill>
+          <a:ln w="6350"/>
+          <a:effectLst>
+            <a:softEdge rad="31750"/>
+          </a:effectLst>
+        </p:spPr>
+        <p:style>
+          <a:lnRef idx="2">
+            <a:schemeClr val="accent1">
+              <a:shade val="15000"/>
+            </a:schemeClr>
+          </a:lnRef>
+          <a:fillRef idx="1">
+            <a:schemeClr val="accent1"/>
+          </a:fillRef>
+          <a:effectRef idx="0">
+            <a:schemeClr val="accent1"/>
+          </a:effectRef>
+          <a:fontRef idx="minor">
+            <a:schemeClr val="lt1"/>
+          </a:fontRef>
+        </p:style>
+        <p:txBody>
+          <a:bodyPr rtlCol="0" anchor="ctr"/>
+          <a:lstStyle/>
+          <a:p>
+            <a:pPr algn="ctr"/>
+            <a:r>
+              <a:rPr lang="de-DE" sz="1050" dirty="0">
+                <a:solidFill>
+                  <a:srgbClr val="0C3548"/>
+                </a:solidFill>
+              </a:rPr>
+              <a:t>MDOI, APT, x:akta,  </a:t>
+            </a:r>
+            <a:r>
+              <a:rPr lang="de-DE" sz="1050" dirty="0" err="1">
+                <a:solidFill>
+                  <a:srgbClr val="0C3548"/>
+                </a:solidFill>
+              </a:rPr>
+              <a:t>netsite</a:t>
+            </a:r>
+            <a:r>
+              <a:rPr lang="de-DE" sz="1050" dirty="0">
+                <a:solidFill>
+                  <a:srgbClr val="0C3548"/>
+                </a:solidFill>
+              </a:rPr>
+              <a:t>, </a:t>
+            </a:r>
+            <a:r>
+              <a:rPr lang="de-DE" sz="1050" dirty="0" err="1">
+                <a:solidFill>
+                  <a:srgbClr val="0C3548"/>
+                </a:solidFill>
+              </a:rPr>
+              <a:t>or</a:t>
+            </a:r>
+            <a:r>
+              <a:rPr lang="de-DE" sz="1050" dirty="0">
+                <a:solidFill>
+                  <a:srgbClr val="0C3548"/>
+                </a:solidFill>
+              </a:rPr>
+              <a:t> </a:t>
+            </a:r>
+            <a:r>
+              <a:rPr lang="de-DE" sz="1050" dirty="0" err="1">
+                <a:solidFill>
+                  <a:srgbClr val="0C3548"/>
+                </a:solidFill>
+              </a:rPr>
+              <a:t>NetExplorer</a:t>
+            </a:r>
+            <a:r>
+              <a:rPr lang="de-DE" sz="1050" dirty="0">
+                <a:solidFill>
+                  <a:srgbClr val="0C3548"/>
+                </a:solidFill>
+              </a:rPr>
+              <a:t> ?</a:t>
+            </a:r>
+          </a:p>
+        </p:txBody>
+      </p:sp>
+      <p:cxnSp>
+        <p:nvCxnSpPr>
+          <p:cNvPr id="94" name="Verbinder: gekrümmt 93">
+            <a:extLst>
+              <a:ext uri="{FF2B5EF4-FFF2-40B4-BE49-F238E27FC236}">
+                <a16:creationId xmlns:a16="http://schemas.microsoft.com/office/drawing/2014/main" id="{4A929FCE-C5E2-C09A-A325-D67B1F090F9B}"/>
+              </a:ext>
+            </a:extLst>
+          </p:cNvPr>
+          <p:cNvCxnSpPr>
+            <a:cxnSpLocks/>
+            <a:stCxn id="93" idx="2"/>
+            <a:endCxn id="7" idx="1"/>
+          </p:cNvCxnSpPr>
+          <p:nvPr/>
+        </p:nvCxnSpPr>
+        <p:spPr>
+          <a:xfrm rot="16200000" flipH="1">
+            <a:off x="2178892" y="1539854"/>
+            <a:ext cx="2363714" cy="1556972"/>
+          </a:xfrm>
+          <a:prstGeom prst="curvedConnector2">
+            <a:avLst/>
+          </a:prstGeom>
+          <a:ln>
+            <a:tailEnd type="triangle"/>
+          </a:ln>
+        </p:spPr>
+        <p:style>
+          <a:lnRef idx="2">
+            <a:schemeClr val="accent1"/>
+          </a:lnRef>
+          <a:fillRef idx="0">
+            <a:schemeClr val="accent1"/>
+          </a:fillRef>
+          <a:effectRef idx="1">
+            <a:schemeClr val="accent1"/>
+          </a:effectRef>
+          <a:fontRef idx="minor">
+            <a:schemeClr val="tx1"/>
+          </a:fontRef>
+        </p:style>
+      </p:cxnSp>
+      <p:sp>
+        <p:nvSpPr>
+          <p:cNvPr id="97" name="Textfeld 96">
+            <a:extLst>
+              <a:ext uri="{FF2B5EF4-FFF2-40B4-BE49-F238E27FC236}">
+                <a16:creationId xmlns:a16="http://schemas.microsoft.com/office/drawing/2014/main" id="{338DA43D-6D61-DD93-720A-FA8DCA5DE23D}"/>
+              </a:ext>
+            </a:extLst>
+          </p:cNvPr>
+          <p:cNvSpPr txBox="1"/>
+          <p:nvPr/>
+        </p:nvSpPr>
+        <p:spPr>
+          <a:xfrm>
+            <a:off x="350663" y="5380946"/>
+            <a:ext cx="2551960" cy="415498"/>
+          </a:xfrm>
+          <a:prstGeom prst="rect">
+            <a:avLst/>
+          </a:prstGeom>
+          <a:noFill/>
+        </p:spPr>
+        <p:txBody>
+          <a:bodyPr wrap="square" lIns="0" tIns="0" rIns="0" bIns="0" rtlCol="0">
+            <a:spAutoFit/>
+          </a:bodyPr>
+          <a:lstStyle/>
+          <a:p>
+            <a:r>
+              <a:rPr lang="en-US" sz="900" dirty="0"/>
+              <a:t>Documenting file locations for FTP download</a:t>
+            </a:r>
+            <a:endParaRPr lang="en-US" sz="900" noProof="0" dirty="0"/>
+          </a:p>
+          <a:p>
+            <a:r>
+              <a:rPr lang="en-US" sz="900" noProof="0" dirty="0"/>
+              <a:t>Updating the firmware approvals</a:t>
+            </a:r>
+          </a:p>
+          <a:p>
+            <a:r>
+              <a:rPr lang="en-US" sz="900" dirty="0"/>
+              <a:t>(</a:t>
+            </a:r>
+            <a:r>
+              <a:rPr lang="en-US" sz="900" dirty="0" err="1"/>
+              <a:t>InterpretationFunctions</a:t>
+            </a:r>
+            <a:r>
+              <a:rPr lang="en-US" sz="900" dirty="0"/>
+              <a:t>)</a:t>
+            </a:r>
+          </a:p>
+        </p:txBody>
+      </p:sp>
+      <p:sp>
+        <p:nvSpPr>
+          <p:cNvPr id="98" name="Textfeld 97">
+            <a:extLst>
+              <a:ext uri="{FF2B5EF4-FFF2-40B4-BE49-F238E27FC236}">
+                <a16:creationId xmlns:a16="http://schemas.microsoft.com/office/drawing/2014/main" id="{6AB09B5E-9F59-C3E1-9C3C-A881A35A105B}"/>
+              </a:ext>
+            </a:extLst>
+          </p:cNvPr>
+          <p:cNvSpPr txBox="1"/>
+          <p:nvPr/>
+        </p:nvSpPr>
+        <p:spPr>
+          <a:xfrm>
+            <a:off x="9952386" y="1936060"/>
+            <a:ext cx="1803405" cy="246221"/>
+          </a:xfrm>
+          <a:prstGeom prst="rect">
+            <a:avLst/>
+          </a:prstGeom>
+          <a:noFill/>
+        </p:spPr>
+        <p:txBody>
+          <a:bodyPr wrap="square" lIns="0" tIns="0" rIns="0" bIns="0" rtlCol="0">
+            <a:spAutoFit/>
+          </a:bodyPr>
+          <a:lstStyle/>
+          <a:p>
+            <a:pPr algn="r"/>
+            <a:r>
+              <a:rPr lang="de-DE" sz="1600" dirty="0">
+                <a:solidFill>
+                  <a:schemeClr val="bg1">
+                    <a:lumMod val="75000"/>
+                  </a:schemeClr>
+                </a:solidFill>
+              </a:rPr>
+              <a:t>Tools</a:t>
+            </a:r>
+          </a:p>
+        </p:txBody>
+      </p:sp>
+      <p:sp>
+        <p:nvSpPr>
+          <p:cNvPr id="101" name="Textfeld 100">
+            <a:extLst>
+              <a:ext uri="{FF2B5EF4-FFF2-40B4-BE49-F238E27FC236}">
+                <a16:creationId xmlns:a16="http://schemas.microsoft.com/office/drawing/2014/main" id="{DAD1B585-20B5-B317-B2A8-A64000572D67}"/>
+              </a:ext>
+            </a:extLst>
+          </p:cNvPr>
+          <p:cNvSpPr txBox="1"/>
+          <p:nvPr/>
+        </p:nvSpPr>
+        <p:spPr>
+          <a:xfrm>
+            <a:off x="383258" y="1222011"/>
+            <a:ext cx="2028083" cy="276999"/>
+          </a:xfrm>
+          <a:prstGeom prst="rect">
+            <a:avLst/>
+          </a:prstGeom>
+          <a:noFill/>
+        </p:spPr>
+        <p:txBody>
+          <a:bodyPr wrap="square" lIns="0" tIns="0" rIns="0" bIns="0" rtlCol="0">
+            <a:spAutoFit/>
+          </a:bodyPr>
+          <a:lstStyle/>
+          <a:p>
+            <a:r>
+              <a:rPr lang="en-US" sz="900" dirty="0"/>
+              <a:t>Moving </a:t>
+            </a:r>
+            <a:r>
+              <a:rPr lang="en-US" sz="900" noProof="0" dirty="0"/>
+              <a:t>devices between device groups</a:t>
+            </a:r>
+          </a:p>
+          <a:p>
+            <a:r>
+              <a:rPr lang="en-US" sz="900" noProof="0" dirty="0"/>
+              <a:t>(</a:t>
+            </a:r>
+            <a:r>
+              <a:rPr lang="en-US" sz="900" noProof="0" dirty="0" err="1"/>
+              <a:t>InterpretationFunctions</a:t>
+            </a:r>
+            <a:r>
+              <a:rPr lang="en-US" sz="900" noProof="0" dirty="0"/>
+              <a:t>)</a:t>
+            </a:r>
+          </a:p>
+        </p:txBody>
+      </p:sp>
+      <p:sp>
+        <p:nvSpPr>
+          <p:cNvPr id="103" name="Textfeld 102">
+            <a:extLst>
+              <a:ext uri="{FF2B5EF4-FFF2-40B4-BE49-F238E27FC236}">
+                <a16:creationId xmlns:a16="http://schemas.microsoft.com/office/drawing/2014/main" id="{65AB0FD1-335D-95A2-D5F4-07035912B1A9}"/>
+              </a:ext>
+            </a:extLst>
+          </p:cNvPr>
+          <p:cNvSpPr txBox="1"/>
+          <p:nvPr/>
+        </p:nvSpPr>
+        <p:spPr>
+          <a:xfrm>
+            <a:off x="5204204" y="859483"/>
+            <a:ext cx="2551471" cy="276999"/>
+          </a:xfrm>
+          <a:prstGeom prst="rect">
+            <a:avLst/>
+          </a:prstGeom>
+          <a:noFill/>
+        </p:spPr>
+        <p:txBody>
+          <a:bodyPr wrap="square" lIns="0" tIns="0" rIns="0" bIns="0" rtlCol="0">
+            <a:spAutoFit/>
+          </a:bodyPr>
+          <a:lstStyle/>
+          <a:p>
+            <a:r>
+              <a:rPr lang="en-US" sz="900" noProof="0" dirty="0"/>
+              <a:t>Creating, updating and deleting device groups</a:t>
+            </a:r>
+          </a:p>
+          <a:p>
+            <a:r>
+              <a:rPr lang="en-US" sz="900" dirty="0"/>
+              <a:t>(</a:t>
+            </a:r>
+            <a:r>
+              <a:rPr lang="en-US" sz="900" dirty="0" err="1"/>
+              <a:t>InterpretationFunctions</a:t>
+            </a:r>
+            <a:r>
+              <a:rPr lang="en-US" sz="900" dirty="0"/>
+              <a:t>)</a:t>
+            </a:r>
+            <a:endParaRPr lang="en-US" sz="900" noProof="0" dirty="0"/>
+          </a:p>
+        </p:txBody>
+      </p:sp>
+      <p:cxnSp>
+        <p:nvCxnSpPr>
+          <p:cNvPr id="108" name="Verbinder: gekrümmt 107">
+            <a:extLst>
+              <a:ext uri="{FF2B5EF4-FFF2-40B4-BE49-F238E27FC236}">
+                <a16:creationId xmlns:a16="http://schemas.microsoft.com/office/drawing/2014/main" id="{A6FAF5D0-7886-4418-57E8-A5FAB7BE26A9}"/>
+              </a:ext>
+            </a:extLst>
+          </p:cNvPr>
+          <p:cNvCxnSpPr>
+            <a:cxnSpLocks/>
+            <a:stCxn id="14" idx="3"/>
+            <a:endCxn id="7" idx="1"/>
+          </p:cNvCxnSpPr>
+          <p:nvPr/>
+        </p:nvCxnSpPr>
+        <p:spPr>
+          <a:xfrm flipV="1">
+            <a:off x="2551748" y="3500197"/>
+            <a:ext cx="1587487" cy="1058510"/>
+          </a:xfrm>
+          <a:prstGeom prst="curvedConnector3">
+            <a:avLst>
+              <a:gd name="adj1" fmla="val 50000"/>
+            </a:avLst>
+          </a:prstGeom>
+          <a:ln>
+            <a:tailEnd type="triangle"/>
+          </a:ln>
+        </p:spPr>
+        <p:style>
+          <a:lnRef idx="2">
+            <a:schemeClr val="accent1"/>
+          </a:lnRef>
+          <a:fillRef idx="0">
+            <a:schemeClr val="accent1"/>
+          </a:fillRef>
+          <a:effectRef idx="1">
+            <a:schemeClr val="accent1"/>
+          </a:effectRef>
+          <a:fontRef idx="minor">
+            <a:schemeClr val="tx1"/>
+          </a:fontRef>
+        </p:style>
+      </p:cxnSp>
+      <p:sp>
+        <p:nvSpPr>
+          <p:cNvPr id="123" name="Rechteck: abgerundete Ecken 122">
+            <a:extLst>
+              <a:ext uri="{FF2B5EF4-FFF2-40B4-BE49-F238E27FC236}">
+                <a16:creationId xmlns:a16="http://schemas.microsoft.com/office/drawing/2014/main" id="{14A8D1B3-EE08-B5FD-1728-6FC271F965EE}"/>
+              </a:ext>
+            </a:extLst>
+          </p:cNvPr>
+          <p:cNvSpPr/>
+          <p:nvPr/>
+        </p:nvSpPr>
+        <p:spPr>
+          <a:xfrm>
+            <a:off x="3164689" y="4475839"/>
+            <a:ext cx="198971" cy="335869"/>
+          </a:xfrm>
+          <a:prstGeom prst="roundRect">
+            <a:avLst/>
+          </a:prstGeom>
+          <a:gradFill flip="none" rotWithShape="1">
+            <a:gsLst>
+              <a:gs pos="0">
+                <a:schemeClr val="accent4">
+                  <a:lumMod val="40000"/>
+                  <a:lumOff val="60000"/>
+                </a:schemeClr>
+              </a:gs>
+              <a:gs pos="46000">
+                <a:schemeClr val="accent4">
+                  <a:lumMod val="95000"/>
+                  <a:lumOff val="5000"/>
+                </a:schemeClr>
+              </a:gs>
+              <a:gs pos="100000">
+                <a:schemeClr val="accent1">
+                  <a:lumMod val="40000"/>
+                  <a:lumOff val="60000"/>
+                </a:schemeClr>
+              </a:gs>
+            </a:gsLst>
+            <a:path path="circle">
+              <a:fillToRect l="50000" t="130000" r="50000" b="-30000"/>
+            </a:path>
+            <a:tileRect/>
+          </a:gradFill>
+          <a:ln w="6350"/>
+          <a:effectLst>
+            <a:softEdge rad="12700"/>
+          </a:effectLst>
+        </p:spPr>
+        <p:style>
+          <a:lnRef idx="2">
+            <a:schemeClr val="accent1">
+              <a:shade val="15000"/>
+            </a:schemeClr>
+          </a:lnRef>
+          <a:fillRef idx="1">
+            <a:schemeClr val="accent1"/>
+          </a:fillRef>
+          <a:effectRef idx="0">
+            <a:schemeClr val="accent1"/>
+          </a:effectRef>
+          <a:fontRef idx="minor">
+            <a:schemeClr val="lt1"/>
+          </a:fontRef>
+        </p:style>
+        <p:txBody>
+          <a:bodyPr rtlCol="0" anchor="ctr"/>
+          <a:lstStyle/>
+          <a:p>
+            <a:pPr algn="ctr"/>
+            <a:endParaRPr lang="de-DE" sz="1200">
+              <a:solidFill>
+                <a:schemeClr val="accent1"/>
+              </a:solidFill>
+            </a:endParaRPr>
+          </a:p>
+        </p:txBody>
+      </p:sp>
+      <p:cxnSp>
+        <p:nvCxnSpPr>
+          <p:cNvPr id="126" name="Verbinder: gekrümmt 125">
+            <a:extLst>
+              <a:ext uri="{FF2B5EF4-FFF2-40B4-BE49-F238E27FC236}">
+                <a16:creationId xmlns:a16="http://schemas.microsoft.com/office/drawing/2014/main" id="{19A698F7-F9CE-4437-6CDA-E9D7DC23B7D6}"/>
+              </a:ext>
+            </a:extLst>
+          </p:cNvPr>
+          <p:cNvCxnSpPr>
+            <a:cxnSpLocks/>
+            <a:stCxn id="123" idx="3"/>
+          </p:cNvCxnSpPr>
+          <p:nvPr/>
+        </p:nvCxnSpPr>
+        <p:spPr>
+          <a:xfrm flipV="1">
+            <a:off x="3363660" y="3897055"/>
+            <a:ext cx="792299" cy="746719"/>
+          </a:xfrm>
+          <a:prstGeom prst="curvedConnector3">
+            <a:avLst>
+              <a:gd name="adj1" fmla="val 63961"/>
+            </a:avLst>
+          </a:prstGeom>
+        </p:spPr>
+        <p:style>
+          <a:lnRef idx="2">
+            <a:schemeClr val="accent1"/>
+          </a:lnRef>
+          <a:fillRef idx="0">
+            <a:schemeClr val="accent1"/>
+          </a:fillRef>
+          <a:effectRef idx="1">
+            <a:schemeClr val="accent1"/>
+          </a:effectRef>
+          <a:fontRef idx="minor">
+            <a:schemeClr val="tx1"/>
+          </a:fontRef>
+        </p:style>
+      </p:cxnSp>
+      <p:grpSp>
+        <p:nvGrpSpPr>
+          <p:cNvPr id="1052" name="Gruppieren 1051">
+            <a:extLst>
+              <a:ext uri="{FF2B5EF4-FFF2-40B4-BE49-F238E27FC236}">
+                <a16:creationId xmlns:a16="http://schemas.microsoft.com/office/drawing/2014/main" id="{B1C82535-A75D-FCB5-99DB-7A1C15A07D52}"/>
+              </a:ext>
+            </a:extLst>
+          </p:cNvPr>
+          <p:cNvGrpSpPr/>
+          <p:nvPr/>
+        </p:nvGrpSpPr>
+        <p:grpSpPr>
+          <a:xfrm>
+            <a:off x="5162322" y="103758"/>
+            <a:ext cx="657427" cy="700923"/>
+            <a:chOff x="288722" y="3938144"/>
+            <a:chExt cx="657427" cy="700923"/>
+          </a:xfrm>
+        </p:grpSpPr>
+        <p:pic>
+          <p:nvPicPr>
+            <p:cNvPr id="1053" name="Grafik 1052" descr="Männliches Profil Silhouette">
+              <a:extLst>
+                <a:ext uri="{FF2B5EF4-FFF2-40B4-BE49-F238E27FC236}">
+                  <a16:creationId xmlns:a16="http://schemas.microsoft.com/office/drawing/2014/main" id="{4E4A3194-0D96-20FD-32F8-465C3C46C197}"/>
+                </a:ext>
+              </a:extLst>
+            </p:cNvPr>
+            <p:cNvPicPr>
+              <a:picLocks noChangeAspect="1"/>
+            </p:cNvPicPr>
+            <p:nvPr/>
+          </p:nvPicPr>
+          <p:blipFill>
+            <a:blip>
+              <a:extLst>
+                <a:ext uri="{96DAC541-7B7A-43D3-8B79-37D633B846F1}">
+                  <asvg:svgBlip xmlns:asvg="http://schemas.microsoft.com/office/drawing/2016/SVG/main" r:embed="rId2"/>
+                </a:ext>
+              </a:extLst>
+            </a:blip>
+            <a:stretch>
+              <a:fillRect/>
+            </a:stretch>
+          </p:blipFill>
+          <p:spPr>
+            <a:xfrm>
+              <a:off x="288722" y="3938144"/>
+              <a:ext cx="657427" cy="657427"/>
+            </a:xfrm>
+            <a:prstGeom prst="rect">
+              <a:avLst/>
+            </a:prstGeom>
+          </p:spPr>
+        </p:pic>
+        <p:sp>
+          <p:nvSpPr>
+            <p:cNvPr id="1054" name="Textfeld 1053">
+              <a:extLst>
+                <a:ext uri="{FF2B5EF4-FFF2-40B4-BE49-F238E27FC236}">
+                  <a16:creationId xmlns:a16="http://schemas.microsoft.com/office/drawing/2014/main" id="{1A324310-4533-7B9B-D86A-6A35D9B3B813}"/>
+                </a:ext>
+              </a:extLst>
+            </p:cNvPr>
+            <p:cNvSpPr txBox="1"/>
+            <p:nvPr/>
+          </p:nvSpPr>
+          <p:spPr>
+            <a:xfrm>
+              <a:off x="340213" y="4500568"/>
+              <a:ext cx="605936" cy="138499"/>
+            </a:xfrm>
+            <a:prstGeom prst="rect">
+              <a:avLst/>
+            </a:prstGeom>
+            <a:noFill/>
+          </p:spPr>
+          <p:txBody>
+            <a:bodyPr wrap="square" lIns="0" tIns="0" rIns="0" bIns="0" rtlCol="0">
+              <a:spAutoFit/>
+            </a:bodyPr>
+            <a:lstStyle/>
+            <a:p>
+              <a:r>
+                <a:rPr lang="de-DE" sz="900" dirty="0" err="1"/>
+                <a:t>Operations</a:t>
+              </a:r>
+              <a:endParaRPr lang="de-DE" sz="900" dirty="0"/>
+            </a:p>
+          </p:txBody>
+        </p:sp>
+      </p:grpSp>
+      <p:sp>
+        <p:nvSpPr>
+          <p:cNvPr id="1056" name="Rechteck: abgerundete Ecken 1055">
+            <a:extLst>
+              <a:ext uri="{FF2B5EF4-FFF2-40B4-BE49-F238E27FC236}">
+                <a16:creationId xmlns:a16="http://schemas.microsoft.com/office/drawing/2014/main" id="{DD3CCD38-7A07-7389-B24A-683AB45F6AB4}"/>
+              </a:ext>
+            </a:extLst>
+          </p:cNvPr>
+          <p:cNvSpPr/>
+          <p:nvPr/>
+        </p:nvSpPr>
+        <p:spPr>
+          <a:xfrm>
+            <a:off x="3825246" y="943310"/>
+            <a:ext cx="1213293" cy="785064"/>
+          </a:xfrm>
+          <a:prstGeom prst="roundRect">
+            <a:avLst/>
+          </a:prstGeom>
+          <a:gradFill flip="none" rotWithShape="1">
+            <a:gsLst>
+              <a:gs pos="0">
+                <a:schemeClr val="accent5">
+                  <a:lumMod val="40000"/>
+                  <a:lumOff val="60000"/>
+                  <a:alpha val="20000"/>
+                </a:schemeClr>
+              </a:gs>
+              <a:gs pos="46000">
+                <a:schemeClr val="accent5">
+                  <a:lumMod val="95000"/>
+                  <a:lumOff val="5000"/>
+                  <a:alpha val="20000"/>
+                </a:schemeClr>
+              </a:gs>
+              <a:gs pos="100000">
+                <a:schemeClr val="accent5">
+                  <a:lumMod val="60000"/>
+                  <a:alpha val="20000"/>
+                </a:schemeClr>
+              </a:gs>
+            </a:gsLst>
+            <a:path path="circle">
+              <a:fillToRect l="50000" t="130000" r="50000" b="-30000"/>
+            </a:path>
+            <a:tileRect/>
+          </a:gradFill>
+          <a:ln w="6350"/>
+          <a:effectLst>
+            <a:softEdge rad="31750"/>
+          </a:effectLst>
+        </p:spPr>
+        <p:style>
+          <a:lnRef idx="2">
+            <a:schemeClr val="accent1">
+              <a:shade val="15000"/>
+            </a:schemeClr>
+          </a:lnRef>
+          <a:fillRef idx="1">
+            <a:schemeClr val="accent1"/>
+          </a:fillRef>
+          <a:effectRef idx="0">
+            <a:schemeClr val="accent1"/>
+          </a:effectRef>
+          <a:fontRef idx="minor">
+            <a:schemeClr val="lt1"/>
+          </a:fontRef>
+        </p:style>
+        <p:txBody>
+          <a:bodyPr rtlCol="0" anchor="ctr"/>
+          <a:lstStyle/>
+          <a:p>
+            <a:pPr algn="ctr"/>
+            <a:r>
+              <a:rPr lang="de-DE" sz="1050">
+                <a:solidFill>
+                  <a:srgbClr val="0C3548"/>
+                </a:solidFill>
+              </a:rPr>
+              <a:t>TechM</a:t>
+            </a:r>
+            <a:endParaRPr lang="de-DE" sz="1050" dirty="0">
+              <a:solidFill>
+                <a:srgbClr val="0C3548"/>
+              </a:solidFill>
+            </a:endParaRPr>
+          </a:p>
+        </p:txBody>
+      </p:sp>
+      <p:cxnSp>
+        <p:nvCxnSpPr>
+          <p:cNvPr id="1057" name="Verbinder: gekrümmt 1056">
+            <a:extLst>
+              <a:ext uri="{FF2B5EF4-FFF2-40B4-BE49-F238E27FC236}">
+                <a16:creationId xmlns:a16="http://schemas.microsoft.com/office/drawing/2014/main" id="{E4784497-D739-672D-09C3-240123E15010}"/>
+              </a:ext>
+            </a:extLst>
+          </p:cNvPr>
+          <p:cNvCxnSpPr>
+            <a:cxnSpLocks/>
+            <a:stCxn id="1056" idx="2"/>
+            <a:endCxn id="7" idx="1"/>
+          </p:cNvCxnSpPr>
+          <p:nvPr/>
+        </p:nvCxnSpPr>
+        <p:spPr>
+          <a:xfrm rot="5400000">
+            <a:off x="3399653" y="2467956"/>
+            <a:ext cx="1771823" cy="292658"/>
+          </a:xfrm>
+          <a:prstGeom prst="curvedConnector4">
+            <a:avLst>
+              <a:gd name="adj1" fmla="val 35552"/>
+              <a:gd name="adj2" fmla="val 178112"/>
+            </a:avLst>
+          </a:prstGeom>
+          <a:ln>
+            <a:tailEnd type="triangle"/>
+          </a:ln>
+        </p:spPr>
+        <p:style>
+          <a:lnRef idx="2">
+            <a:schemeClr val="accent1"/>
+          </a:lnRef>
+          <a:fillRef idx="0">
+            <a:schemeClr val="accent1"/>
+          </a:fillRef>
+          <a:effectRef idx="1">
+            <a:schemeClr val="accent1"/>
+          </a:effectRef>
+          <a:fontRef idx="minor">
+            <a:schemeClr val="tx1"/>
+          </a:fontRef>
+        </p:style>
+      </p:cxnSp>
+      <p:sp>
+        <p:nvSpPr>
+          <p:cNvPr id="1061" name="Rechteck: abgerundete Ecken 1060">
+            <a:extLst>
+              <a:ext uri="{FF2B5EF4-FFF2-40B4-BE49-F238E27FC236}">
+                <a16:creationId xmlns:a16="http://schemas.microsoft.com/office/drawing/2014/main" id="{33B03BB6-6D7E-E172-5237-A259456CE832}"/>
+              </a:ext>
+            </a:extLst>
+          </p:cNvPr>
+          <p:cNvSpPr/>
+          <p:nvPr/>
+        </p:nvSpPr>
+        <p:spPr>
+          <a:xfrm>
+            <a:off x="4881907" y="2169842"/>
+            <a:ext cx="198971" cy="335869"/>
+          </a:xfrm>
+          <a:prstGeom prst="roundRect">
+            <a:avLst/>
+          </a:prstGeom>
+          <a:gradFill flip="none" rotWithShape="1">
+            <a:gsLst>
+              <a:gs pos="0">
+                <a:schemeClr val="accent4">
+                  <a:lumMod val="40000"/>
+                  <a:lumOff val="60000"/>
+                </a:schemeClr>
+              </a:gs>
+              <a:gs pos="46000">
+                <a:schemeClr val="accent4">
+                  <a:lumMod val="95000"/>
+                  <a:lumOff val="5000"/>
+                </a:schemeClr>
+              </a:gs>
+              <a:gs pos="100000">
+                <a:schemeClr val="accent1">
+                  <a:lumMod val="40000"/>
+                  <a:lumOff val="60000"/>
+                </a:schemeClr>
+              </a:gs>
+            </a:gsLst>
+            <a:path path="circle">
+              <a:fillToRect l="50000" t="130000" r="50000" b="-30000"/>
+            </a:path>
+            <a:tileRect/>
+          </a:gradFill>
+          <a:ln w="6350"/>
+          <a:effectLst>
+            <a:softEdge rad="12700"/>
+          </a:effectLst>
+        </p:spPr>
+        <p:style>
+          <a:lnRef idx="2">
+            <a:schemeClr val="accent1">
+              <a:shade val="15000"/>
+            </a:schemeClr>
+          </a:lnRef>
+          <a:fillRef idx="1">
+            <a:schemeClr val="accent1"/>
+          </a:fillRef>
+          <a:effectRef idx="0">
+            <a:schemeClr val="accent1"/>
+          </a:effectRef>
+          <a:fontRef idx="minor">
+            <a:schemeClr val="lt1"/>
+          </a:fontRef>
+        </p:style>
+        <p:txBody>
+          <a:bodyPr rtlCol="0" anchor="ctr"/>
+          <a:lstStyle/>
+          <a:p>
+            <a:pPr algn="ctr"/>
+            <a:endParaRPr lang="de-DE" sz="1200">
+              <a:solidFill>
+                <a:schemeClr val="accent1"/>
+              </a:solidFill>
+            </a:endParaRPr>
+          </a:p>
+        </p:txBody>
+      </p:sp>
+      <p:cxnSp>
+        <p:nvCxnSpPr>
+          <p:cNvPr id="1063" name="Verbinder: gekrümmt 1062">
+            <a:extLst>
+              <a:ext uri="{FF2B5EF4-FFF2-40B4-BE49-F238E27FC236}">
+                <a16:creationId xmlns:a16="http://schemas.microsoft.com/office/drawing/2014/main" id="{EE6A4E27-94DD-6512-FFA7-10CA0DAEAC49}"/>
+              </a:ext>
+            </a:extLst>
+          </p:cNvPr>
+          <p:cNvCxnSpPr>
+            <a:cxnSpLocks/>
+            <a:stCxn id="1061" idx="2"/>
+            <a:endCxn id="7" idx="0"/>
+          </p:cNvCxnSpPr>
+          <p:nvPr/>
+        </p:nvCxnSpPr>
+        <p:spPr>
+          <a:xfrm rot="5400000">
+            <a:off x="4619102" y="2625906"/>
+            <a:ext cx="482487" cy="242096"/>
+          </a:xfrm>
+          <a:prstGeom prst="curvedConnector3">
+            <a:avLst>
+              <a:gd name="adj1" fmla="val 50000"/>
+            </a:avLst>
+          </a:prstGeom>
+        </p:spPr>
+        <p:style>
+          <a:lnRef idx="2">
+            <a:schemeClr val="accent1"/>
+          </a:lnRef>
+          <a:fillRef idx="0">
+            <a:schemeClr val="accent1"/>
+          </a:fillRef>
+          <a:effectRef idx="1">
+            <a:schemeClr val="accent1"/>
+          </a:effectRef>
+          <a:fontRef idx="minor">
+            <a:schemeClr val="tx1"/>
+          </a:fontRef>
+        </p:style>
+      </p:cxnSp>
+      <p:sp>
+        <p:nvSpPr>
+          <p:cNvPr id="1067" name="Textfeld 1066">
+            <a:extLst>
+              <a:ext uri="{FF2B5EF4-FFF2-40B4-BE49-F238E27FC236}">
+                <a16:creationId xmlns:a16="http://schemas.microsoft.com/office/drawing/2014/main" id="{11670DFC-C0A7-9072-9903-BA20D506E895}"/>
+              </a:ext>
+            </a:extLst>
+          </p:cNvPr>
+          <p:cNvSpPr txBox="1"/>
+          <p:nvPr/>
+        </p:nvSpPr>
+        <p:spPr>
+          <a:xfrm>
+            <a:off x="4489706" y="1828650"/>
+            <a:ext cx="855204" cy="276999"/>
+          </a:xfrm>
+          <a:prstGeom prst="rect">
+            <a:avLst/>
+          </a:prstGeom>
+          <a:noFill/>
+        </p:spPr>
+        <p:txBody>
+          <a:bodyPr wrap="square" lIns="0" tIns="0" rIns="0" bIns="0" rtlCol="0">
+            <a:spAutoFit/>
+          </a:bodyPr>
+          <a:lstStyle/>
+          <a:p>
+            <a:r>
+              <a:rPr lang="en-US" sz="900" noProof="0" dirty="0"/>
+              <a:t>Either Tool or </a:t>
+            </a:r>
+          </a:p>
+          <a:p>
+            <a:r>
+              <a:rPr lang="en-US" sz="900" noProof="0" dirty="0" err="1"/>
+              <a:t>miniGUI</a:t>
+            </a:r>
+            <a:r>
+              <a:rPr lang="en-US" sz="900" noProof="0" dirty="0"/>
+              <a:t> module</a:t>
+            </a:r>
+          </a:p>
+        </p:txBody>
+      </p:sp>
+      <p:sp>
+        <p:nvSpPr>
+          <p:cNvPr id="1071" name="Rechteck: abgerundete Ecken 1070">
+            <a:extLst>
+              <a:ext uri="{FF2B5EF4-FFF2-40B4-BE49-F238E27FC236}">
+                <a16:creationId xmlns:a16="http://schemas.microsoft.com/office/drawing/2014/main" id="{65507465-8A9D-6A74-544C-B9F51CBCD9A4}"/>
+              </a:ext>
+            </a:extLst>
+          </p:cNvPr>
+          <p:cNvSpPr/>
+          <p:nvPr/>
+        </p:nvSpPr>
+        <p:spPr>
+          <a:xfrm>
+            <a:off x="7645793" y="1087279"/>
+            <a:ext cx="593016" cy="374321"/>
+          </a:xfrm>
+          <a:prstGeom prst="roundRect">
+            <a:avLst/>
+          </a:prstGeom>
+          <a:gradFill flip="none" rotWithShape="1">
+            <a:gsLst>
+              <a:gs pos="0">
+                <a:schemeClr val="accent5">
+                  <a:lumMod val="40000"/>
+                  <a:lumOff val="60000"/>
+                  <a:alpha val="20000"/>
+                </a:schemeClr>
+              </a:gs>
+              <a:gs pos="46000">
+                <a:schemeClr val="accent5">
+                  <a:lumMod val="95000"/>
+                  <a:lumOff val="5000"/>
+                  <a:alpha val="20000"/>
+                </a:schemeClr>
+              </a:gs>
+              <a:gs pos="100000">
+                <a:schemeClr val="accent5">
+                  <a:lumMod val="60000"/>
+                  <a:alpha val="20000"/>
+                </a:schemeClr>
+              </a:gs>
+            </a:gsLst>
+            <a:path path="circle">
+              <a:fillToRect l="50000" t="130000" r="50000" b="-30000"/>
+            </a:path>
+            <a:tileRect/>
+          </a:gradFill>
+          <a:ln w="6350"/>
+          <a:effectLst>
+            <a:softEdge rad="31750"/>
+          </a:effectLst>
+        </p:spPr>
+        <p:style>
+          <a:lnRef idx="2">
+            <a:schemeClr val="accent1">
+              <a:shade val="15000"/>
+            </a:schemeClr>
+          </a:lnRef>
+          <a:fillRef idx="1">
+            <a:schemeClr val="accent1"/>
+          </a:fillRef>
+          <a:effectRef idx="0">
+            <a:schemeClr val="accent1"/>
+          </a:effectRef>
+          <a:fontRef idx="minor">
+            <a:schemeClr val="lt1"/>
+          </a:fontRef>
+        </p:style>
+        <p:txBody>
+          <a:bodyPr rtlCol="0" anchor="ctr"/>
+          <a:lstStyle/>
+          <a:p>
+            <a:pPr algn="ctr"/>
+            <a:r>
+              <a:rPr lang="de-DE" sz="1050" dirty="0">
+                <a:solidFill>
+                  <a:srgbClr val="0C3548"/>
+                </a:solidFill>
+              </a:rPr>
+              <a:t>TSM</a:t>
+            </a:r>
+          </a:p>
+        </p:txBody>
+      </p:sp>
+      <p:sp>
+        <p:nvSpPr>
+          <p:cNvPr id="1074" name="Textfeld 1073">
+            <a:extLst>
+              <a:ext uri="{FF2B5EF4-FFF2-40B4-BE49-F238E27FC236}">
+                <a16:creationId xmlns:a16="http://schemas.microsoft.com/office/drawing/2014/main" id="{36285271-A9C8-C239-63D0-D4F35039FF34}"/>
+              </a:ext>
+            </a:extLst>
+          </p:cNvPr>
+          <p:cNvSpPr txBox="1"/>
+          <p:nvPr/>
+        </p:nvSpPr>
+        <p:spPr>
+          <a:xfrm>
+            <a:off x="6239699" y="1528432"/>
+            <a:ext cx="1751061" cy="138499"/>
+          </a:xfrm>
+          <a:prstGeom prst="rect">
+            <a:avLst/>
+          </a:prstGeom>
+          <a:noFill/>
+        </p:spPr>
+        <p:txBody>
+          <a:bodyPr wrap="square" lIns="0" tIns="0" rIns="0" bIns="0" rtlCol="0">
+            <a:spAutoFit/>
+          </a:bodyPr>
+          <a:lstStyle/>
+          <a:p>
+            <a:pPr algn="r"/>
+            <a:r>
+              <a:rPr lang="en-US" sz="900" noProof="0" dirty="0"/>
+              <a:t>Supervising automated activities</a:t>
+            </a:r>
+          </a:p>
+        </p:txBody>
+      </p:sp>
+      <p:sp>
+        <p:nvSpPr>
+          <p:cNvPr id="1078" name="Rechteck: abgerundete Ecken 1077">
+            <a:extLst>
+              <a:ext uri="{FF2B5EF4-FFF2-40B4-BE49-F238E27FC236}">
+                <a16:creationId xmlns:a16="http://schemas.microsoft.com/office/drawing/2014/main" id="{B065A177-0430-C36B-82BD-B4B0FE8812C4}"/>
+              </a:ext>
+            </a:extLst>
+          </p:cNvPr>
+          <p:cNvSpPr/>
+          <p:nvPr/>
+        </p:nvSpPr>
+        <p:spPr>
+          <a:xfrm>
+            <a:off x="8911893" y="1545031"/>
+            <a:ext cx="1437623" cy="374321"/>
+          </a:xfrm>
+          <a:prstGeom prst="roundRect">
+            <a:avLst/>
+          </a:prstGeom>
+          <a:gradFill flip="none" rotWithShape="1">
+            <a:gsLst>
+              <a:gs pos="0">
+                <a:schemeClr val="accent5">
+                  <a:lumMod val="40000"/>
+                  <a:lumOff val="60000"/>
+                  <a:alpha val="20000"/>
+                </a:schemeClr>
+              </a:gs>
+              <a:gs pos="46000">
+                <a:schemeClr val="accent5">
+                  <a:lumMod val="95000"/>
+                  <a:lumOff val="5000"/>
+                  <a:alpha val="20000"/>
+                </a:schemeClr>
+              </a:gs>
+              <a:gs pos="100000">
+                <a:schemeClr val="accent5">
+                  <a:lumMod val="60000"/>
+                  <a:alpha val="20000"/>
+                </a:schemeClr>
+              </a:gs>
+            </a:gsLst>
+            <a:path path="circle">
+              <a:fillToRect l="50000" t="130000" r="50000" b="-30000"/>
+            </a:path>
+            <a:tileRect/>
+          </a:gradFill>
+          <a:ln w="6350"/>
+          <a:effectLst>
+            <a:softEdge rad="31750"/>
+          </a:effectLst>
+        </p:spPr>
+        <p:style>
+          <a:lnRef idx="2">
+            <a:schemeClr val="accent1">
+              <a:shade val="15000"/>
+            </a:schemeClr>
+          </a:lnRef>
+          <a:fillRef idx="1">
+            <a:schemeClr val="accent1"/>
+          </a:fillRef>
+          <a:effectRef idx="0">
+            <a:schemeClr val="accent1"/>
+          </a:effectRef>
+          <a:fontRef idx="minor">
+            <a:schemeClr val="lt1"/>
+          </a:fontRef>
+        </p:style>
+        <p:txBody>
+          <a:bodyPr rtlCol="0" anchor="ctr"/>
+          <a:lstStyle/>
+          <a:p>
+            <a:pPr algn="ctr"/>
+            <a:r>
+              <a:rPr lang="de-DE" sz="1050" dirty="0" err="1">
+                <a:solidFill>
+                  <a:srgbClr val="0C3548"/>
+                </a:solidFill>
+              </a:rPr>
+              <a:t>AutomationEngine</a:t>
+            </a:r>
+            <a:endParaRPr lang="de-DE" sz="1050" dirty="0">
+              <a:solidFill>
+                <a:srgbClr val="0C3548"/>
+              </a:solidFill>
+            </a:endParaRPr>
+          </a:p>
+        </p:txBody>
+      </p:sp>
+      <p:cxnSp>
+        <p:nvCxnSpPr>
+          <p:cNvPr id="1079" name="Verbinder: gekrümmt 1078">
+            <a:extLst>
+              <a:ext uri="{FF2B5EF4-FFF2-40B4-BE49-F238E27FC236}">
+                <a16:creationId xmlns:a16="http://schemas.microsoft.com/office/drawing/2014/main" id="{43F4430B-7CF5-3035-5D74-1A6256CC853D}"/>
+              </a:ext>
+            </a:extLst>
+          </p:cNvPr>
+          <p:cNvCxnSpPr>
+            <a:cxnSpLocks/>
+            <a:stCxn id="11" idx="0"/>
+            <a:endCxn id="1078" idx="2"/>
+          </p:cNvCxnSpPr>
+          <p:nvPr/>
+        </p:nvCxnSpPr>
+        <p:spPr>
+          <a:xfrm rot="5400000" flipH="1" flipV="1">
+            <a:off x="6614720" y="2059433"/>
+            <a:ext cx="3156066" cy="2875904"/>
+          </a:xfrm>
+          <a:prstGeom prst="curvedConnector3">
+            <a:avLst>
+              <a:gd name="adj1" fmla="val 50000"/>
+            </a:avLst>
+          </a:prstGeom>
+          <a:ln>
+            <a:tailEnd type="triangle"/>
+          </a:ln>
+        </p:spPr>
+        <p:style>
+          <a:lnRef idx="2">
+            <a:schemeClr val="accent1"/>
+          </a:lnRef>
+          <a:fillRef idx="0">
+            <a:schemeClr val="accent1"/>
+          </a:fillRef>
+          <a:effectRef idx="1">
+            <a:schemeClr val="accent1"/>
+          </a:effectRef>
+          <a:fontRef idx="minor">
+            <a:schemeClr val="tx1"/>
+          </a:fontRef>
+        </p:style>
+      </p:cxnSp>
+      <p:cxnSp>
+        <p:nvCxnSpPr>
+          <p:cNvPr id="1086" name="Verbinder: gekrümmt 1085">
+            <a:extLst>
+              <a:ext uri="{FF2B5EF4-FFF2-40B4-BE49-F238E27FC236}">
+                <a16:creationId xmlns:a16="http://schemas.microsoft.com/office/drawing/2014/main" id="{46FF63E0-3ECB-3559-2DA1-3C9439FE9387}"/>
+              </a:ext>
+            </a:extLst>
+          </p:cNvPr>
+          <p:cNvCxnSpPr>
+            <a:cxnSpLocks/>
+            <a:stCxn id="1078" idx="0"/>
+            <a:endCxn id="1071" idx="3"/>
+          </p:cNvCxnSpPr>
+          <p:nvPr/>
+        </p:nvCxnSpPr>
+        <p:spPr>
+          <a:xfrm rot="16200000" flipV="1">
+            <a:off x="8799462" y="713788"/>
+            <a:ext cx="270591" cy="1391896"/>
+          </a:xfrm>
+          <a:prstGeom prst="curvedConnector2">
+            <a:avLst/>
+          </a:prstGeom>
+          <a:ln>
+            <a:tailEnd type="triangle"/>
+          </a:ln>
+        </p:spPr>
+        <p:style>
+          <a:lnRef idx="2">
+            <a:schemeClr val="accent1"/>
+          </a:lnRef>
+          <a:fillRef idx="0">
+            <a:schemeClr val="accent1"/>
+          </a:fillRef>
+          <a:effectRef idx="1">
+            <a:schemeClr val="accent1"/>
+          </a:effectRef>
+          <a:fontRef idx="minor">
+            <a:schemeClr val="tx1"/>
+          </a:fontRef>
+        </p:style>
+      </p:cxnSp>
+      <p:grpSp>
+        <p:nvGrpSpPr>
+          <p:cNvPr id="1089" name="Gruppieren 1088">
+            <a:extLst>
+              <a:ext uri="{FF2B5EF4-FFF2-40B4-BE49-F238E27FC236}">
+                <a16:creationId xmlns:a16="http://schemas.microsoft.com/office/drawing/2014/main" id="{CD1DC46E-53BD-660F-7278-3479A3265217}"/>
+              </a:ext>
+            </a:extLst>
+          </p:cNvPr>
+          <p:cNvGrpSpPr/>
+          <p:nvPr/>
+        </p:nvGrpSpPr>
+        <p:grpSpPr>
+          <a:xfrm>
+            <a:off x="10525374" y="249937"/>
+            <a:ext cx="657427" cy="700923"/>
+            <a:chOff x="288722" y="3938144"/>
+            <a:chExt cx="657427" cy="700923"/>
+          </a:xfrm>
+        </p:grpSpPr>
+        <p:pic>
+          <p:nvPicPr>
+            <p:cNvPr id="1090" name="Grafik 1089" descr="Männliches Profil Silhouette">
+              <a:extLst>
+                <a:ext uri="{FF2B5EF4-FFF2-40B4-BE49-F238E27FC236}">
+                  <a16:creationId xmlns:a16="http://schemas.microsoft.com/office/drawing/2014/main" id="{CD6FBD42-1556-B549-73D2-F572D9918C52}"/>
+                </a:ext>
+              </a:extLst>
+            </p:cNvPr>
+            <p:cNvPicPr>
+              <a:picLocks noChangeAspect="1"/>
+            </p:cNvPicPr>
+            <p:nvPr/>
+          </p:nvPicPr>
+          <p:blipFill>
+            <a:blip>
+              <a:extLst>
+                <a:ext uri="{96DAC541-7B7A-43D3-8B79-37D633B846F1}">
+                  <asvg:svgBlip xmlns:asvg="http://schemas.microsoft.com/office/drawing/2016/SVG/main" r:embed="rId2"/>
+                </a:ext>
+              </a:extLst>
+            </a:blip>
+            <a:stretch>
+              <a:fillRect/>
+            </a:stretch>
+          </p:blipFill>
+          <p:spPr>
+            <a:xfrm>
+              <a:off x="288722" y="3938144"/>
+              <a:ext cx="657427" cy="657427"/>
+            </a:xfrm>
+            <a:prstGeom prst="rect">
+              <a:avLst/>
+            </a:prstGeom>
+          </p:spPr>
+        </p:pic>
+        <p:sp>
+          <p:nvSpPr>
+            <p:cNvPr id="1091" name="Textfeld 1090">
+              <a:extLst>
+                <a:ext uri="{FF2B5EF4-FFF2-40B4-BE49-F238E27FC236}">
+                  <a16:creationId xmlns:a16="http://schemas.microsoft.com/office/drawing/2014/main" id="{FF007CDE-3C73-6204-10C6-41679F616226}"/>
+                </a:ext>
+              </a:extLst>
+            </p:cNvPr>
+            <p:cNvSpPr txBox="1"/>
+            <p:nvPr/>
+          </p:nvSpPr>
+          <p:spPr>
+            <a:xfrm>
+              <a:off x="340213" y="4500568"/>
+              <a:ext cx="605936" cy="138499"/>
+            </a:xfrm>
+            <a:prstGeom prst="rect">
+              <a:avLst/>
+            </a:prstGeom>
+            <a:noFill/>
+          </p:spPr>
+          <p:txBody>
+            <a:bodyPr wrap="square" lIns="0" tIns="0" rIns="0" bIns="0" rtlCol="0">
+              <a:spAutoFit/>
+            </a:bodyPr>
+            <a:lstStyle/>
+            <a:p>
+              <a:r>
+                <a:rPr lang="de-DE" sz="900" dirty="0"/>
+                <a:t>Automation</a:t>
+              </a:r>
+            </a:p>
+          </p:txBody>
+        </p:sp>
+      </p:grpSp>
+      <p:sp>
+        <p:nvSpPr>
+          <p:cNvPr id="1092" name="Textfeld 1091">
+            <a:extLst>
+              <a:ext uri="{FF2B5EF4-FFF2-40B4-BE49-F238E27FC236}">
+                <a16:creationId xmlns:a16="http://schemas.microsoft.com/office/drawing/2014/main" id="{135333C5-71BC-8F49-44B1-A5914EC46719}"/>
+              </a:ext>
+            </a:extLst>
+          </p:cNvPr>
+          <p:cNvSpPr txBox="1"/>
+          <p:nvPr/>
+        </p:nvSpPr>
+        <p:spPr>
+          <a:xfrm>
+            <a:off x="9096669" y="1037434"/>
+            <a:ext cx="2054753" cy="276999"/>
+          </a:xfrm>
+          <a:prstGeom prst="rect">
+            <a:avLst/>
+          </a:prstGeom>
+          <a:noFill/>
+        </p:spPr>
+        <p:txBody>
+          <a:bodyPr wrap="square" lIns="0" tIns="0" rIns="0" bIns="0" rtlCol="0">
+            <a:spAutoFit/>
+          </a:bodyPr>
+          <a:lstStyle/>
+          <a:p>
+            <a:pPr algn="r"/>
+            <a:r>
+              <a:rPr lang="en-US" sz="900" dirty="0"/>
+              <a:t>Creating, updating and closing tickets</a:t>
+            </a:r>
+          </a:p>
+          <a:p>
+            <a:pPr algn="r"/>
+            <a:r>
+              <a:rPr lang="en-US" sz="900" noProof="0" dirty="0"/>
+              <a:t>(Notifications)</a:t>
+            </a:r>
+          </a:p>
+        </p:txBody>
+      </p:sp>
+      <p:sp>
+        <p:nvSpPr>
+          <p:cNvPr id="8" name="Textfeld 7">
+            <a:extLst>
+              <a:ext uri="{FF2B5EF4-FFF2-40B4-BE49-F238E27FC236}">
+                <a16:creationId xmlns:a16="http://schemas.microsoft.com/office/drawing/2014/main" id="{A4BD7105-E313-67C8-E762-B06C0674B623}"/>
+              </a:ext>
+            </a:extLst>
+          </p:cNvPr>
+          <p:cNvSpPr txBox="1"/>
+          <p:nvPr/>
+        </p:nvSpPr>
+        <p:spPr>
+          <a:xfrm>
+            <a:off x="2647661" y="4902666"/>
+            <a:ext cx="855204" cy="276999"/>
+          </a:xfrm>
+          <a:prstGeom prst="rect">
+            <a:avLst/>
+          </a:prstGeom>
+          <a:noFill/>
+        </p:spPr>
+        <p:txBody>
+          <a:bodyPr wrap="square" lIns="0" tIns="0" rIns="0" bIns="0" rtlCol="0">
+            <a:spAutoFit/>
+          </a:bodyPr>
+          <a:lstStyle/>
+          <a:p>
+            <a:r>
+              <a:rPr lang="en-US" sz="900" noProof="0" dirty="0"/>
+              <a:t>Either Tool or </a:t>
+            </a:r>
+          </a:p>
+          <a:p>
+            <a:r>
+              <a:rPr lang="en-US" sz="900" noProof="0" dirty="0" err="1"/>
+              <a:t>miniGUI</a:t>
+            </a:r>
+            <a:r>
+              <a:rPr lang="en-US" sz="900" noProof="0" dirty="0"/>
+              <a:t> module</a:t>
+            </a:r>
+          </a:p>
+        </p:txBody>
+      </p:sp>
+      <p:sp>
+        <p:nvSpPr>
+          <p:cNvPr id="14" name="Rechteck: abgerundete Ecken 13">
+            <a:extLst>
+              <a:ext uri="{FF2B5EF4-FFF2-40B4-BE49-F238E27FC236}">
+                <a16:creationId xmlns:a16="http://schemas.microsoft.com/office/drawing/2014/main" id="{0011813F-2534-6455-6B97-10E193B6A308}"/>
+              </a:ext>
+            </a:extLst>
+          </p:cNvPr>
+          <p:cNvSpPr/>
+          <p:nvPr/>
+        </p:nvSpPr>
+        <p:spPr>
+          <a:xfrm>
+            <a:off x="1338455" y="4166175"/>
+            <a:ext cx="1213293" cy="785064"/>
+          </a:xfrm>
+          <a:prstGeom prst="roundRect">
+            <a:avLst/>
+          </a:prstGeom>
+          <a:gradFill flip="none" rotWithShape="1">
+            <a:gsLst>
+              <a:gs pos="0">
+                <a:schemeClr val="accent5">
+                  <a:lumMod val="40000"/>
+                  <a:lumOff val="60000"/>
+                  <a:alpha val="20000"/>
+                </a:schemeClr>
+              </a:gs>
+              <a:gs pos="46000">
+                <a:schemeClr val="accent5">
+                  <a:lumMod val="95000"/>
+                  <a:lumOff val="5000"/>
+                  <a:alpha val="20000"/>
+                </a:schemeClr>
+              </a:gs>
+              <a:gs pos="100000">
+                <a:schemeClr val="accent5">
+                  <a:lumMod val="60000"/>
+                  <a:alpha val="20000"/>
+                </a:schemeClr>
+              </a:gs>
+            </a:gsLst>
+            <a:path path="circle">
+              <a:fillToRect l="50000" t="130000" r="50000" b="-30000"/>
+            </a:path>
+            <a:tileRect/>
+          </a:gradFill>
+          <a:ln w="6350"/>
+          <a:effectLst>
+            <a:softEdge rad="31750"/>
+          </a:effectLst>
+        </p:spPr>
+        <p:style>
+          <a:lnRef idx="2">
+            <a:schemeClr val="accent1">
+              <a:shade val="15000"/>
+            </a:schemeClr>
+          </a:lnRef>
+          <a:fillRef idx="1">
+            <a:schemeClr val="accent1"/>
+          </a:fillRef>
+          <a:effectRef idx="0">
+            <a:schemeClr val="accent1"/>
+          </a:effectRef>
+          <a:fontRef idx="minor">
+            <a:schemeClr val="lt1"/>
+          </a:fontRef>
+        </p:style>
+        <p:txBody>
+          <a:bodyPr rtlCol="0" anchor="ctr"/>
+          <a:lstStyle/>
+          <a:p>
+            <a:pPr algn="ctr"/>
+            <a:r>
+              <a:rPr lang="de-DE" sz="1050">
+                <a:solidFill>
+                  <a:srgbClr val="0C3548"/>
+                </a:solidFill>
+              </a:rPr>
+              <a:t>TechM</a:t>
+            </a:r>
+            <a:endParaRPr lang="de-DE" sz="1050" dirty="0">
+              <a:solidFill>
+                <a:srgbClr val="0C3548"/>
+              </a:solidFill>
+            </a:endParaRPr>
+          </a:p>
+        </p:txBody>
+      </p:sp>
+    </p:spTree>
+    <p:extLst>
+      <p:ext uri="{BB962C8B-B14F-4D97-AF65-F5344CB8AC3E}">
+        <p14:creationId xmlns:p14="http://schemas.microsoft.com/office/powerpoint/2010/main" val="3786168490"/>
+      </p:ext>
+    </p:extLst>
+  </p:cSld>
+  <p:clrMapOvr>
+    <a:masterClrMapping/>
+  </p:clrMapOvr>
+</p:sld>
+</file>
+
+<file path=ppt/slides/slide3.xml><?xml version="1.0" encoding="utf-8"?>
+<p:sld xmlns:a="http://schemas.openxmlformats.org/drawingml/2006/main" xmlns:r="http://schemas.openxmlformats.org/officeDocument/2006/relationships" xmlns:p="http://schemas.openxmlformats.org/presentationml/2006/main">
+  <p:cSld>
+    <p:spTree>
+      <p:nvGrpSpPr>
+        <p:cNvPr id="1" name=""/>
+        <p:cNvGrpSpPr/>
+        <p:nvPr/>
+      </p:nvGrpSpPr>
+      <p:grpSpPr>
+        <a:xfrm>
+          <a:off x="0" y="0"/>
+          <a:ext cx="0" cy="0"/>
+          <a:chOff x="0" y="0"/>
+          <a:chExt cx="0" cy="0"/>
+        </a:xfrm>
+      </p:grpSpPr>
+      <p:sp>
+        <p:nvSpPr>
+          <p:cNvPr id="66" name="Ellipse 65">
+            <a:extLst>
+              <a:ext uri="{FF2B5EF4-FFF2-40B4-BE49-F238E27FC236}">
+                <a16:creationId xmlns:a16="http://schemas.microsoft.com/office/drawing/2014/main" id="{77537B90-9C30-A0F7-668C-BA3621D1E7DC}"/>
+              </a:ext>
+            </a:extLst>
+          </p:cNvPr>
+          <p:cNvSpPr/>
+          <p:nvPr/>
+        </p:nvSpPr>
+        <p:spPr>
+          <a:xfrm>
+            <a:off x="9341840" y="5219128"/>
+            <a:ext cx="2584249" cy="1454292"/>
+          </a:xfrm>
+          <a:prstGeom prst="ellipse">
+            <a:avLst/>
+          </a:prstGeom>
+          <a:solidFill>
+            <a:srgbClr val="FFE48F"/>
+          </a:solidFill>
+          <a:ln w="38100">
+            <a:solidFill>
+              <a:srgbClr val="FFC000"/>
+            </a:solidFill>
+          </a:ln>
+        </p:spPr>
+        <p:style>
+          <a:lnRef idx="2">
+            <a:schemeClr val="accent1">
+              <a:shade val="15000"/>
+            </a:schemeClr>
+          </a:lnRef>
+          <a:fillRef idx="1">
+            <a:schemeClr val="accent1"/>
+          </a:fillRef>
+          <a:effectRef idx="0">
+            <a:schemeClr val="accent1"/>
+          </a:effectRef>
+          <a:fontRef idx="minor">
+            <a:schemeClr val="lt1"/>
+          </a:fontRef>
+        </p:style>
+        <p:txBody>
+          <a:bodyPr rtlCol="0" anchor="ctr"/>
+          <a:lstStyle/>
+          <a:p>
+            <a:pPr algn="ctr"/>
+            <a:r>
+              <a:rPr lang="de-DE" sz="1200" dirty="0" err="1">
+                <a:solidFill>
+                  <a:srgbClr val="AC8300"/>
+                </a:solidFill>
+              </a:rPr>
+              <a:t>OpenDayLight</a:t>
+            </a:r>
+            <a:endParaRPr lang="de-DE" sz="1200" dirty="0">
+              <a:solidFill>
+                <a:srgbClr val="AC8300"/>
+              </a:solidFill>
+            </a:endParaRPr>
+          </a:p>
+          <a:p>
+            <a:pPr algn="ctr"/>
+            <a:endParaRPr lang="de-DE" sz="1200" dirty="0">
+              <a:solidFill>
+                <a:srgbClr val="D6A300"/>
+              </a:solidFill>
+            </a:endParaRPr>
+          </a:p>
+          <a:p>
+            <a:pPr algn="ctr"/>
+            <a:endParaRPr lang="de-DE" sz="1200" dirty="0">
+              <a:solidFill>
+                <a:srgbClr val="D6A300"/>
+              </a:solidFill>
+            </a:endParaRPr>
+          </a:p>
+          <a:p>
+            <a:pPr algn="ctr"/>
+            <a:endParaRPr lang="de-DE" sz="1200" dirty="0">
+              <a:solidFill>
+                <a:srgbClr val="D6A300"/>
+              </a:solidFill>
+            </a:endParaRPr>
+          </a:p>
+          <a:p>
+            <a:pPr algn="ctr"/>
+            <a:endParaRPr lang="de-DE" sz="1200" dirty="0">
+              <a:solidFill>
+                <a:srgbClr val="D6A300"/>
+              </a:solidFill>
+            </a:endParaRPr>
+          </a:p>
+          <a:p>
+            <a:pPr algn="ctr"/>
+            <a:endParaRPr lang="de-DE" sz="1200" dirty="0">
+              <a:solidFill>
+                <a:srgbClr val="D6A300"/>
+              </a:solidFill>
+            </a:endParaRPr>
+          </a:p>
+        </p:txBody>
+      </p:sp>
+      <p:pic>
+        <p:nvPicPr>
+          <p:cNvPr id="1045" name="Grafik 1044">
+            <a:extLst>
+              <a:ext uri="{FF2B5EF4-FFF2-40B4-BE49-F238E27FC236}">
+                <a16:creationId xmlns:a16="http://schemas.microsoft.com/office/drawing/2014/main" id="{CE92FA6D-19EF-5509-14D1-60039A2E8A37}"/>
+              </a:ext>
+            </a:extLst>
+          </p:cNvPr>
+          <p:cNvPicPr>
+            <a:picLocks noChangeAspect="1"/>
+          </p:cNvPicPr>
+          <p:nvPr/>
+        </p:nvPicPr>
+        <p:blipFill>
+          <a:blip r:embed="rId2"/>
+          <a:stretch>
+            <a:fillRect/>
+          </a:stretch>
+        </p:blipFill>
+        <p:spPr>
+          <a:xfrm>
+            <a:off x="1326055" y="4167687"/>
+            <a:ext cx="542453" cy="523080"/>
+          </a:xfrm>
+          <a:prstGeom prst="rect">
+            <a:avLst/>
+          </a:prstGeom>
+        </p:spPr>
+      </p:pic>
+      <p:sp>
+        <p:nvSpPr>
+          <p:cNvPr id="1102" name="Rechteck: abgerundete Ecken 1101">
+            <a:extLst>
+              <a:ext uri="{FF2B5EF4-FFF2-40B4-BE49-F238E27FC236}">
+                <a16:creationId xmlns:a16="http://schemas.microsoft.com/office/drawing/2014/main" id="{1A61B044-3307-893E-BB2E-DA6D851C9CD9}"/>
+              </a:ext>
+            </a:extLst>
+          </p:cNvPr>
+          <p:cNvSpPr/>
+          <p:nvPr/>
+        </p:nvSpPr>
+        <p:spPr>
+          <a:xfrm>
+            <a:off x="8610930" y="352784"/>
+            <a:ext cx="2633922" cy="1755138"/>
+          </a:xfrm>
+          <a:prstGeom prst="roundRect">
+            <a:avLst/>
+          </a:prstGeom>
+          <a:solidFill>
+            <a:srgbClr val="D6A300">
+              <a:alpha val="34000"/>
+            </a:srgbClr>
+          </a:solidFill>
+          <a:ln>
+            <a:noFill/>
+          </a:ln>
+          <a:effectLst>
+            <a:softEdge rad="31750"/>
+          </a:effectLst>
+        </p:spPr>
+        <p:style>
+          <a:lnRef idx="2">
+            <a:schemeClr val="accent1">
+              <a:shade val="15000"/>
+            </a:schemeClr>
+          </a:lnRef>
+          <a:fillRef idx="1">
+            <a:schemeClr val="accent1"/>
+          </a:fillRef>
+          <a:effectRef idx="0">
+            <a:schemeClr val="accent1"/>
+          </a:effectRef>
+          <a:fontRef idx="minor">
+            <a:schemeClr val="lt1"/>
+          </a:fontRef>
+        </p:style>
+        <p:txBody>
+          <a:bodyPr rtlCol="0" anchor="ctr"/>
+          <a:lstStyle/>
+          <a:p>
+            <a:pPr algn="ctr"/>
+            <a:endParaRPr lang="de-DE"/>
+          </a:p>
+        </p:txBody>
+      </p:sp>
+      <p:sp>
+        <p:nvSpPr>
+          <p:cNvPr id="1095" name="Rechteck: abgerundete Ecken 1094">
+            <a:extLst>
+              <a:ext uri="{FF2B5EF4-FFF2-40B4-BE49-F238E27FC236}">
+                <a16:creationId xmlns:a16="http://schemas.microsoft.com/office/drawing/2014/main" id="{342073D0-60DD-2612-AA76-235217D11772}"/>
+              </a:ext>
+            </a:extLst>
+          </p:cNvPr>
+          <p:cNvSpPr/>
+          <p:nvPr/>
+        </p:nvSpPr>
+        <p:spPr>
+          <a:xfrm>
+            <a:off x="3648899" y="109856"/>
+            <a:ext cx="4728077" cy="2485489"/>
+          </a:xfrm>
+          <a:prstGeom prst="roundRect">
+            <a:avLst/>
+          </a:prstGeom>
+          <a:solidFill>
+            <a:srgbClr val="D6A300">
+              <a:alpha val="34000"/>
+            </a:srgbClr>
+          </a:solidFill>
+          <a:ln>
+            <a:noFill/>
+          </a:ln>
+          <a:effectLst>
+            <a:softEdge rad="31750"/>
+          </a:effectLst>
+        </p:spPr>
+        <p:style>
+          <a:lnRef idx="2">
+            <a:schemeClr val="accent1">
+              <a:shade val="15000"/>
+            </a:schemeClr>
+          </a:lnRef>
+          <a:fillRef idx="1">
+            <a:schemeClr val="accent1"/>
+          </a:fillRef>
+          <a:effectRef idx="0">
+            <a:schemeClr val="accent1"/>
+          </a:effectRef>
+          <a:fontRef idx="minor">
+            <a:schemeClr val="lt1"/>
+          </a:fontRef>
+        </p:style>
+        <p:txBody>
+          <a:bodyPr rtlCol="0" anchor="ctr"/>
+          <a:lstStyle/>
+          <a:p>
+            <a:pPr algn="ctr"/>
+            <a:endParaRPr lang="de-DE"/>
+          </a:p>
+        </p:txBody>
+      </p:sp>
+      <p:sp>
+        <p:nvSpPr>
+          <p:cNvPr id="1094" name="Rechteck: abgerundete Ecken 1093">
+            <a:extLst>
+              <a:ext uri="{FF2B5EF4-FFF2-40B4-BE49-F238E27FC236}">
+                <a16:creationId xmlns:a16="http://schemas.microsoft.com/office/drawing/2014/main" id="{83BECAAE-F182-6FDC-7463-D4D53D12189A}"/>
+              </a:ext>
+            </a:extLst>
+          </p:cNvPr>
+          <p:cNvSpPr/>
+          <p:nvPr/>
+        </p:nvSpPr>
+        <p:spPr>
+          <a:xfrm>
+            <a:off x="196483" y="103758"/>
+            <a:ext cx="3253378" cy="1624615"/>
+          </a:xfrm>
+          <a:prstGeom prst="roundRect">
+            <a:avLst/>
+          </a:prstGeom>
+          <a:solidFill>
+            <a:srgbClr val="D6A300">
+              <a:alpha val="34000"/>
+            </a:srgbClr>
+          </a:solidFill>
+          <a:ln>
+            <a:noFill/>
+          </a:ln>
+          <a:effectLst>
+            <a:softEdge rad="31750"/>
+          </a:effectLst>
+        </p:spPr>
+        <p:style>
+          <a:lnRef idx="2">
+            <a:schemeClr val="accent1">
+              <a:shade val="15000"/>
+            </a:schemeClr>
+          </a:lnRef>
+          <a:fillRef idx="1">
+            <a:schemeClr val="accent1"/>
+          </a:fillRef>
+          <a:effectRef idx="0">
+            <a:schemeClr val="accent1"/>
+          </a:effectRef>
+          <a:fontRef idx="minor">
+            <a:schemeClr val="lt1"/>
+          </a:fontRef>
+        </p:style>
+        <p:txBody>
+          <a:bodyPr rtlCol="0" anchor="ctr"/>
+          <a:lstStyle/>
+          <a:p>
+            <a:pPr algn="ctr"/>
+            <a:endParaRPr lang="de-DE"/>
+          </a:p>
+        </p:txBody>
+      </p:sp>
+      <p:sp>
+        <p:nvSpPr>
+          <p:cNvPr id="1099" name="Rechteck: abgerundete Ecken 1098">
+            <a:extLst>
+              <a:ext uri="{FF2B5EF4-FFF2-40B4-BE49-F238E27FC236}">
+                <a16:creationId xmlns:a16="http://schemas.microsoft.com/office/drawing/2014/main" id="{C41FD093-A98A-FC40-1EA5-CA5160E4F39E}"/>
+              </a:ext>
+            </a:extLst>
+          </p:cNvPr>
+          <p:cNvSpPr/>
+          <p:nvPr/>
+        </p:nvSpPr>
+        <p:spPr>
+          <a:xfrm>
+            <a:off x="196482" y="3997738"/>
+            <a:ext cx="3341321" cy="2591986"/>
+          </a:xfrm>
+          <a:prstGeom prst="roundRect">
+            <a:avLst/>
+          </a:prstGeom>
+          <a:solidFill>
+            <a:srgbClr val="D6A300">
+              <a:alpha val="34000"/>
+            </a:srgbClr>
+          </a:solidFill>
+          <a:ln>
+            <a:noFill/>
+          </a:ln>
+          <a:effectLst>
+            <a:softEdge rad="31750"/>
+          </a:effectLst>
+        </p:spPr>
+        <p:style>
+          <a:lnRef idx="2">
+            <a:schemeClr val="accent1">
+              <a:shade val="15000"/>
+            </a:schemeClr>
+          </a:lnRef>
+          <a:fillRef idx="1">
+            <a:schemeClr val="accent1"/>
+          </a:fillRef>
+          <a:effectRef idx="0">
+            <a:schemeClr val="accent1"/>
+          </a:effectRef>
+          <a:fontRef idx="minor">
+            <a:schemeClr val="lt1"/>
+          </a:fontRef>
+        </p:style>
+        <p:txBody>
+          <a:bodyPr rtlCol="0" anchor="ctr"/>
+          <a:lstStyle/>
+          <a:p>
+            <a:pPr algn="ctr"/>
+            <a:endParaRPr lang="de-DE"/>
+          </a:p>
+        </p:txBody>
+      </p:sp>
+      <p:sp>
+        <p:nvSpPr>
+          <p:cNvPr id="83" name="Rechteck: abgerundete Ecken 82">
+            <a:extLst>
+              <a:ext uri="{FF2B5EF4-FFF2-40B4-BE49-F238E27FC236}">
+                <a16:creationId xmlns:a16="http://schemas.microsoft.com/office/drawing/2014/main" id="{16787611-51E6-65CB-BABC-5AC3C3A7E0E2}"/>
+              </a:ext>
+            </a:extLst>
+          </p:cNvPr>
+          <p:cNvSpPr/>
+          <p:nvPr/>
+        </p:nvSpPr>
+        <p:spPr>
+          <a:xfrm>
+            <a:off x="9341838" y="4706266"/>
+            <a:ext cx="2584249" cy="232349"/>
+          </a:xfrm>
+          <a:prstGeom prst="roundRect">
+            <a:avLst/>
+          </a:prstGeom>
+          <a:gradFill flip="none" rotWithShape="1">
+            <a:gsLst>
+              <a:gs pos="0">
+                <a:schemeClr val="accent4">
+                  <a:lumMod val="40000"/>
+                  <a:lumOff val="60000"/>
+                </a:schemeClr>
+              </a:gs>
+              <a:gs pos="46000">
+                <a:schemeClr val="accent4">
+                  <a:lumMod val="95000"/>
+                  <a:lumOff val="5000"/>
+                </a:schemeClr>
+              </a:gs>
+              <a:gs pos="100000">
+                <a:schemeClr val="accent1">
+                  <a:lumMod val="40000"/>
+                  <a:lumOff val="60000"/>
+                </a:schemeClr>
+              </a:gs>
+            </a:gsLst>
+            <a:path path="circle">
+              <a:fillToRect l="50000" t="130000" r="50000" b="-30000"/>
+            </a:path>
+            <a:tileRect/>
+          </a:gradFill>
+          <a:ln w="6350"/>
+        </p:spPr>
+        <p:style>
+          <a:lnRef idx="2">
+            <a:schemeClr val="accent1">
+              <a:shade val="15000"/>
+            </a:schemeClr>
+          </a:lnRef>
+          <a:fillRef idx="1">
+            <a:schemeClr val="accent1"/>
+          </a:fillRef>
+          <a:effectRef idx="0">
+            <a:schemeClr val="accent1"/>
+          </a:effectRef>
+          <a:fontRef idx="minor">
+            <a:schemeClr val="lt1"/>
+          </a:fontRef>
+        </p:style>
+        <p:txBody>
+          <a:bodyPr rtlCol="0" anchor="ctr"/>
+          <a:lstStyle/>
+          <a:p>
+            <a:pPr algn="ctr"/>
+            <a:r>
+              <a:rPr lang="de-DE" sz="1050" dirty="0" err="1">
+                <a:solidFill>
+                  <a:srgbClr val="0C3548"/>
+                </a:solidFill>
+              </a:rPr>
+              <a:t>MicroWaveDeviceInventory</a:t>
+            </a:r>
+            <a:endParaRPr lang="de-DE" sz="1050" dirty="0">
+              <a:solidFill>
+                <a:srgbClr val="0C3548"/>
+              </a:solidFill>
+            </a:endParaRPr>
+          </a:p>
+        </p:txBody>
+      </p:sp>
+      <p:sp>
+        <p:nvSpPr>
+          <p:cNvPr id="82" name="Rechteck: abgerundete Ecken 81">
+            <a:extLst>
+              <a:ext uri="{FF2B5EF4-FFF2-40B4-BE49-F238E27FC236}">
+                <a16:creationId xmlns:a16="http://schemas.microsoft.com/office/drawing/2014/main" id="{B81FF05A-83DA-D15C-64CB-5B3324D92A38}"/>
+              </a:ext>
+            </a:extLst>
+          </p:cNvPr>
+          <p:cNvSpPr/>
+          <p:nvPr/>
+        </p:nvSpPr>
+        <p:spPr>
+          <a:xfrm>
+            <a:off x="3782984" y="2675235"/>
+            <a:ext cx="5313685" cy="3550920"/>
+          </a:xfrm>
+          <a:prstGeom prst="roundRect">
+            <a:avLst/>
+          </a:prstGeom>
+          <a:gradFill flip="none" rotWithShape="1">
+            <a:gsLst>
+              <a:gs pos="0">
+                <a:schemeClr val="accent4">
+                  <a:lumMod val="40000"/>
+                  <a:lumOff val="60000"/>
+                </a:schemeClr>
+              </a:gs>
+              <a:gs pos="46000">
+                <a:schemeClr val="accent4">
+                  <a:lumMod val="95000"/>
+                  <a:lumOff val="5000"/>
+                </a:schemeClr>
+              </a:gs>
+              <a:gs pos="100000">
+                <a:schemeClr val="accent1">
+                  <a:lumMod val="40000"/>
+                  <a:lumOff val="60000"/>
+                </a:schemeClr>
+              </a:gs>
+            </a:gsLst>
+            <a:path path="circle">
+              <a:fillToRect l="50000" t="130000" r="50000" b="-30000"/>
+            </a:path>
+            <a:tileRect/>
+          </a:gradFill>
+          <a:ln w="6350"/>
+        </p:spPr>
+        <p:style>
+          <a:lnRef idx="2">
+            <a:schemeClr val="accent1">
+              <a:shade val="15000"/>
+            </a:schemeClr>
+          </a:lnRef>
+          <a:fillRef idx="1">
+            <a:schemeClr val="accent1"/>
+          </a:fillRef>
+          <a:effectRef idx="0">
+            <a:schemeClr val="accent1"/>
+          </a:effectRef>
+          <a:fontRef idx="minor">
+            <a:schemeClr val="lt1"/>
+          </a:fontRef>
+        </p:style>
+        <p:txBody>
+          <a:bodyPr rtlCol="0" anchor="ctr"/>
+          <a:lstStyle/>
+          <a:p>
+            <a:pPr algn="ctr"/>
+            <a:endParaRPr lang="de-DE" sz="1200">
+              <a:solidFill>
+                <a:schemeClr val="accent1"/>
+              </a:solidFill>
+            </a:endParaRPr>
+          </a:p>
+        </p:txBody>
+      </p:sp>
+      <p:grpSp>
+        <p:nvGrpSpPr>
+          <p:cNvPr id="64" name="Gruppieren 63">
+            <a:extLst>
+              <a:ext uri="{FF2B5EF4-FFF2-40B4-BE49-F238E27FC236}">
+                <a16:creationId xmlns:a16="http://schemas.microsoft.com/office/drawing/2014/main" id="{AE8041BA-8AD5-2AFC-F71F-DC9E965F3FEF}"/>
+              </a:ext>
+            </a:extLst>
+          </p:cNvPr>
+          <p:cNvGrpSpPr>
+            <a:grpSpLocks noChangeAspect="1"/>
+          </p:cNvGrpSpPr>
+          <p:nvPr/>
+        </p:nvGrpSpPr>
+        <p:grpSpPr>
+          <a:xfrm>
+            <a:off x="4139235" y="2988198"/>
+            <a:ext cx="4625896" cy="2901791"/>
+            <a:chOff x="1463407" y="480277"/>
+            <a:chExt cx="9351655" cy="5866224"/>
+          </a:xfrm>
+          <a:solidFill>
+            <a:schemeClr val="bg1"/>
+          </a:solidFill>
+        </p:grpSpPr>
+        <p:sp>
+          <p:nvSpPr>
+            <p:cNvPr id="2" name="Rechteck 1">
+              <a:extLst>
+                <a:ext uri="{FF2B5EF4-FFF2-40B4-BE49-F238E27FC236}">
+                  <a16:creationId xmlns:a16="http://schemas.microsoft.com/office/drawing/2014/main" id="{27773C9A-AB3B-2833-0C2A-0736B8C50EE8}"/>
+                </a:ext>
+              </a:extLst>
+            </p:cNvPr>
+            <p:cNvSpPr/>
+            <p:nvPr/>
+          </p:nvSpPr>
+          <p:spPr>
+            <a:xfrm>
+              <a:off x="2072866" y="1845889"/>
+              <a:ext cx="2853775" cy="2181857"/>
+            </a:xfrm>
+            <a:prstGeom prst="rect">
+              <a:avLst/>
+            </a:prstGeom>
+            <a:grpFill/>
+            <a:ln>
+              <a:solidFill>
+                <a:schemeClr val="tx1"/>
+              </a:solidFill>
+              <a:prstDash val="dash"/>
+            </a:ln>
+          </p:spPr>
+          <p:style>
+            <a:lnRef idx="2">
+              <a:schemeClr val="accent1">
+                <a:shade val="15000"/>
+              </a:schemeClr>
+            </a:lnRef>
+            <a:fillRef idx="1">
+              <a:schemeClr val="accent1"/>
+            </a:fillRef>
+            <a:effectRef idx="0">
+              <a:schemeClr val="accent1"/>
+            </a:effectRef>
+            <a:fontRef idx="minor">
+              <a:schemeClr val="lt1"/>
+            </a:fontRef>
+          </p:style>
+          <p:txBody>
+            <a:bodyPr rtlCol="0" anchor="ctr"/>
+            <a:lstStyle/>
+            <a:p>
+              <a:pPr algn="ctr"/>
+              <a:endParaRPr lang="de-DE" sz="400">
+                <a:solidFill>
+                  <a:schemeClr val="tx1"/>
+                </a:solidFill>
+              </a:endParaRPr>
+            </a:p>
+          </p:txBody>
+        </p:sp>
+        <p:sp>
+          <p:nvSpPr>
+            <p:cNvPr id="4" name="Rechteck 3">
+              <a:extLst>
+                <a:ext uri="{FF2B5EF4-FFF2-40B4-BE49-F238E27FC236}">
+                  <a16:creationId xmlns:a16="http://schemas.microsoft.com/office/drawing/2014/main" id="{F9CB50F4-AF0D-F3C4-1359-578382187A65}"/>
+                </a:ext>
+              </a:extLst>
+            </p:cNvPr>
+            <p:cNvSpPr/>
+            <p:nvPr/>
+          </p:nvSpPr>
+          <p:spPr>
+            <a:xfrm>
+              <a:off x="7860651" y="3879781"/>
+              <a:ext cx="2691267" cy="2466720"/>
+            </a:xfrm>
+            <a:prstGeom prst="rect">
+              <a:avLst/>
+            </a:prstGeom>
+            <a:grpFill/>
+            <a:ln>
+              <a:solidFill>
+                <a:schemeClr val="tx1"/>
+              </a:solidFill>
+              <a:prstDash val="dash"/>
+            </a:ln>
+          </p:spPr>
+          <p:style>
+            <a:lnRef idx="2">
+              <a:schemeClr val="accent1">
+                <a:shade val="15000"/>
+              </a:schemeClr>
+            </a:lnRef>
+            <a:fillRef idx="1">
+              <a:schemeClr val="accent1"/>
+            </a:fillRef>
+            <a:effectRef idx="0">
+              <a:schemeClr val="accent1"/>
+            </a:effectRef>
+            <a:fontRef idx="minor">
+              <a:schemeClr val="lt1"/>
+            </a:fontRef>
+          </p:style>
+          <p:txBody>
+            <a:bodyPr rtlCol="0" anchor="ctr"/>
+            <a:lstStyle/>
+            <a:p>
+              <a:pPr algn="ctr"/>
+              <a:endParaRPr lang="de-DE" sz="400">
+                <a:solidFill>
+                  <a:schemeClr val="tx1"/>
+                </a:solidFill>
+              </a:endParaRPr>
+            </a:p>
+          </p:txBody>
+        </p:sp>
+        <p:sp>
+          <p:nvSpPr>
+            <p:cNvPr id="5" name="Rechteck 4">
+              <a:extLst>
+                <a:ext uri="{FF2B5EF4-FFF2-40B4-BE49-F238E27FC236}">
+                  <a16:creationId xmlns:a16="http://schemas.microsoft.com/office/drawing/2014/main" id="{A35E910B-3A10-CB29-A735-E3CC94C344B4}"/>
+                </a:ext>
+              </a:extLst>
+            </p:cNvPr>
+            <p:cNvSpPr/>
+            <p:nvPr/>
+          </p:nvSpPr>
+          <p:spPr>
+            <a:xfrm>
+              <a:off x="8349656" y="2607406"/>
+              <a:ext cx="2465406" cy="1530182"/>
+            </a:xfrm>
+            <a:prstGeom prst="rect">
+              <a:avLst/>
+            </a:prstGeom>
+            <a:grpFill/>
+            <a:ln>
+              <a:solidFill>
+                <a:schemeClr val="tx1"/>
+              </a:solidFill>
+              <a:prstDash val="dash"/>
+            </a:ln>
+          </p:spPr>
+          <p:style>
+            <a:lnRef idx="2">
+              <a:schemeClr val="accent1">
+                <a:shade val="15000"/>
+              </a:schemeClr>
+            </a:lnRef>
+            <a:fillRef idx="1">
+              <a:schemeClr val="accent1"/>
+            </a:fillRef>
+            <a:effectRef idx="0">
+              <a:schemeClr val="accent1"/>
+            </a:effectRef>
+            <a:fontRef idx="minor">
+              <a:schemeClr val="lt1"/>
+            </a:fontRef>
+          </p:style>
+          <p:txBody>
+            <a:bodyPr rtlCol="0" anchor="ctr"/>
+            <a:lstStyle/>
+            <a:p>
+              <a:pPr algn="ctr"/>
+              <a:endParaRPr lang="de-DE" sz="400">
+                <a:solidFill>
+                  <a:schemeClr val="tx1"/>
+                </a:solidFill>
+              </a:endParaRPr>
+            </a:p>
+          </p:txBody>
+        </p:sp>
+        <p:sp>
+          <p:nvSpPr>
+            <p:cNvPr id="6" name="Rechteck 5">
+              <a:extLst>
+                <a:ext uri="{FF2B5EF4-FFF2-40B4-BE49-F238E27FC236}">
+                  <a16:creationId xmlns:a16="http://schemas.microsoft.com/office/drawing/2014/main" id="{8ADA5A04-26B6-2353-20AC-E1D1475CDEE9}"/>
+                </a:ext>
+              </a:extLst>
+            </p:cNvPr>
+            <p:cNvSpPr/>
+            <p:nvPr/>
+          </p:nvSpPr>
+          <p:spPr>
+            <a:xfrm>
+              <a:off x="5070217" y="2530708"/>
+              <a:ext cx="2691267" cy="1772098"/>
+            </a:xfrm>
+            <a:prstGeom prst="rect">
+              <a:avLst/>
+            </a:prstGeom>
+            <a:grpFill/>
+            <a:ln>
+              <a:solidFill>
+                <a:schemeClr val="tx1"/>
+              </a:solidFill>
+              <a:prstDash val="dash"/>
+            </a:ln>
+          </p:spPr>
+          <p:style>
+            <a:lnRef idx="2">
+              <a:schemeClr val="accent1">
+                <a:shade val="15000"/>
+              </a:schemeClr>
+            </a:lnRef>
+            <a:fillRef idx="1">
+              <a:schemeClr val="accent1"/>
+            </a:fillRef>
+            <a:effectRef idx="0">
+              <a:schemeClr val="accent1"/>
+            </a:effectRef>
+            <a:fontRef idx="minor">
+              <a:schemeClr val="lt1"/>
+            </a:fontRef>
+          </p:style>
+          <p:txBody>
+            <a:bodyPr rtlCol="0" anchor="ctr"/>
+            <a:lstStyle/>
+            <a:p>
+              <a:pPr algn="ctr"/>
+              <a:endParaRPr lang="de-DE" sz="400">
+                <a:solidFill>
+                  <a:schemeClr val="tx1"/>
+                </a:solidFill>
+              </a:endParaRPr>
+            </a:p>
+          </p:txBody>
+        </p:sp>
+        <p:sp>
+          <p:nvSpPr>
+            <p:cNvPr id="7" name="Rechteck 6">
+              <a:extLst>
+                <a:ext uri="{FF2B5EF4-FFF2-40B4-BE49-F238E27FC236}">
+                  <a16:creationId xmlns:a16="http://schemas.microsoft.com/office/drawing/2014/main" id="{0B737699-65A3-13A4-4C3E-16B9242A4614}"/>
+                </a:ext>
+              </a:extLst>
+            </p:cNvPr>
+            <p:cNvSpPr/>
+            <p:nvPr/>
+          </p:nvSpPr>
+          <p:spPr>
+            <a:xfrm>
+              <a:off x="1463407" y="480277"/>
+              <a:ext cx="2426154" cy="2070100"/>
+            </a:xfrm>
+            <a:prstGeom prst="rect">
+              <a:avLst/>
+            </a:prstGeom>
+            <a:grpFill/>
+            <a:ln>
+              <a:solidFill>
+                <a:schemeClr val="tx1"/>
+              </a:solidFill>
+              <a:prstDash val="dash"/>
+            </a:ln>
+          </p:spPr>
+          <p:style>
+            <a:lnRef idx="2">
+              <a:schemeClr val="accent1">
+                <a:shade val="15000"/>
+              </a:schemeClr>
+            </a:lnRef>
+            <a:fillRef idx="1">
+              <a:schemeClr val="accent1"/>
+            </a:fillRef>
+            <a:effectRef idx="0">
+              <a:schemeClr val="accent1"/>
+            </a:effectRef>
+            <a:fontRef idx="minor">
+              <a:schemeClr val="lt1"/>
+            </a:fontRef>
+          </p:style>
+          <p:txBody>
+            <a:bodyPr rtlCol="0" anchor="ctr"/>
+            <a:lstStyle/>
+            <a:p>
+              <a:pPr algn="ctr"/>
+              <a:endParaRPr lang="de-DE" sz="400">
+                <a:solidFill>
+                  <a:schemeClr val="tx1"/>
+                </a:solidFill>
+              </a:endParaRPr>
+            </a:p>
+          </p:txBody>
+        </p:sp>
+        <p:sp>
+          <p:nvSpPr>
+            <p:cNvPr id="9" name="Zylinder 8">
+              <a:extLst>
+                <a:ext uri="{FF2B5EF4-FFF2-40B4-BE49-F238E27FC236}">
+                  <a16:creationId xmlns:a16="http://schemas.microsoft.com/office/drawing/2014/main" id="{8AF4F4DE-D29E-12E1-61F3-04D8C1A3F303}"/>
+                </a:ext>
+              </a:extLst>
+            </p:cNvPr>
+            <p:cNvSpPr/>
+            <p:nvPr/>
+          </p:nvSpPr>
+          <p:spPr>
+            <a:xfrm>
+              <a:off x="3694241" y="1532710"/>
+              <a:ext cx="1534230" cy="570807"/>
+            </a:xfrm>
+            <a:prstGeom prst="can">
+              <a:avLst/>
+            </a:prstGeom>
+            <a:grpFill/>
+            <a:ln/>
+          </p:spPr>
+          <p:style>
+            <a:lnRef idx="2">
+              <a:schemeClr val="accent1"/>
+            </a:lnRef>
+            <a:fillRef idx="1">
+              <a:schemeClr val="lt1"/>
+            </a:fillRef>
+            <a:effectRef idx="0">
+              <a:schemeClr val="accent1"/>
+            </a:effectRef>
+            <a:fontRef idx="minor">
+              <a:schemeClr val="dk1"/>
+            </a:fontRef>
+          </p:style>
+          <p:txBody>
+            <a:bodyPr lIns="0" tIns="0" rIns="0" bIns="0" rtlCol="0" anchor="ctr"/>
+            <a:lstStyle/>
+            <a:p>
+              <a:pPr algn="ctr"/>
+              <a:r>
+                <a:rPr lang="de-DE" sz="800" dirty="0" err="1"/>
+                <a:t>CandidateDS</a:t>
+              </a:r>
+              <a:endParaRPr lang="de-DE" sz="800" dirty="0">
+                <a:solidFill>
+                  <a:schemeClr val="tx1"/>
+                </a:solidFill>
+              </a:endParaRPr>
+            </a:p>
+          </p:txBody>
+        </p:sp>
+        <p:sp>
+          <p:nvSpPr>
+            <p:cNvPr id="10" name="Zylinder 9">
+              <a:extLst>
+                <a:ext uri="{FF2B5EF4-FFF2-40B4-BE49-F238E27FC236}">
+                  <a16:creationId xmlns:a16="http://schemas.microsoft.com/office/drawing/2014/main" id="{88AAD683-7F21-82A7-AB3C-0A0C267DEDDD}"/>
+                </a:ext>
+              </a:extLst>
+            </p:cNvPr>
+            <p:cNvSpPr/>
+            <p:nvPr/>
+          </p:nvSpPr>
+          <p:spPr>
+            <a:xfrm>
+              <a:off x="7511409" y="3634341"/>
+              <a:ext cx="1534230" cy="570807"/>
+            </a:xfrm>
+            <a:prstGeom prst="can">
+              <a:avLst/>
+            </a:prstGeom>
+            <a:grpFill/>
+            <a:ln/>
+          </p:spPr>
+          <p:style>
+            <a:lnRef idx="2">
+              <a:schemeClr val="accent1"/>
+            </a:lnRef>
+            <a:fillRef idx="1">
+              <a:schemeClr val="lt1"/>
+            </a:fillRef>
+            <a:effectRef idx="0">
+              <a:schemeClr val="accent1"/>
+            </a:effectRef>
+            <a:fontRef idx="minor">
+              <a:schemeClr val="dk1"/>
+            </a:fontRef>
+          </p:style>
+          <p:txBody>
+            <a:bodyPr lIns="0" tIns="0" rIns="0" bIns="0" rtlCol="0" anchor="ctr"/>
+            <a:lstStyle/>
+            <a:p>
+              <a:pPr algn="ctr"/>
+              <a:r>
+                <a:rPr lang="de-DE" sz="800" dirty="0" err="1">
+                  <a:solidFill>
+                    <a:schemeClr val="tx1"/>
+                  </a:solidFill>
+                </a:rPr>
+                <a:t>OperationalDS</a:t>
+              </a:r>
+              <a:endParaRPr lang="de-DE" sz="800" dirty="0">
+                <a:solidFill>
+                  <a:schemeClr val="tx1"/>
+                </a:solidFill>
+              </a:endParaRPr>
+            </a:p>
+          </p:txBody>
+        </p:sp>
+        <p:sp>
+          <p:nvSpPr>
+            <p:cNvPr id="11" name="Scrollen: vertikal 10">
+              <a:extLst>
+                <a:ext uri="{FF2B5EF4-FFF2-40B4-BE49-F238E27FC236}">
+                  <a16:creationId xmlns:a16="http://schemas.microsoft.com/office/drawing/2014/main" id="{497049A3-99AE-A53B-7D22-02541F92867E}"/>
+                </a:ext>
+              </a:extLst>
+            </p:cNvPr>
+            <p:cNvSpPr/>
+            <p:nvPr/>
+          </p:nvSpPr>
+          <p:spPr>
+            <a:xfrm>
+              <a:off x="5946140" y="4699774"/>
+              <a:ext cx="1609724" cy="1303020"/>
+            </a:xfrm>
+            <a:prstGeom prst="verticalScroll">
+              <a:avLst/>
+            </a:prstGeom>
+            <a:grpFill/>
+            <a:ln/>
+          </p:spPr>
+          <p:style>
+            <a:lnRef idx="2">
+              <a:schemeClr val="accent2"/>
+            </a:lnRef>
+            <a:fillRef idx="1">
+              <a:schemeClr val="lt1"/>
+            </a:fillRef>
+            <a:effectRef idx="0">
+              <a:schemeClr val="accent2"/>
+            </a:effectRef>
+            <a:fontRef idx="minor">
+              <a:schemeClr val="dk1"/>
+            </a:fontRef>
+          </p:style>
+          <p:txBody>
+            <a:bodyPr rtlCol="0" anchor="ctr"/>
+            <a:lstStyle/>
+            <a:p>
+              <a:pPr algn="ctr"/>
+              <a:r>
+                <a:rPr lang="de-DE" sz="900" dirty="0">
+                  <a:solidFill>
+                    <a:schemeClr val="tx1"/>
+                  </a:solidFill>
+                </a:rPr>
+                <a:t>Current</a:t>
+              </a:r>
+              <a:br>
+                <a:rPr lang="de-DE" sz="900" dirty="0">
+                  <a:solidFill>
+                    <a:schemeClr val="tx1"/>
+                  </a:solidFill>
+                </a:rPr>
+              </a:br>
+              <a:r>
+                <a:rPr lang="de-DE" sz="900" dirty="0">
+                  <a:solidFill>
+                    <a:schemeClr val="tx1"/>
+                  </a:solidFill>
+                </a:rPr>
+                <a:t>Alarms</a:t>
+              </a:r>
+            </a:p>
+            <a:p>
+              <a:pPr algn="ctr"/>
+              <a:r>
+                <a:rPr lang="de-DE" sz="900" dirty="0">
+                  <a:solidFill>
+                    <a:schemeClr val="tx1"/>
+                  </a:solidFill>
+                </a:rPr>
+                <a:t>(</a:t>
+              </a:r>
+              <a:r>
+                <a:rPr lang="de-DE" sz="900" dirty="0" err="1">
+                  <a:solidFill>
+                    <a:schemeClr val="tx1"/>
+                  </a:solidFill>
+                </a:rPr>
+                <a:t>ToDo</a:t>
+              </a:r>
+              <a:r>
+                <a:rPr lang="de-DE" sz="900" dirty="0">
+                  <a:solidFill>
+                    <a:schemeClr val="tx1"/>
+                  </a:solidFill>
+                </a:rPr>
+                <a:t>-List)</a:t>
+              </a:r>
+            </a:p>
+          </p:txBody>
+        </p:sp>
+        <p:sp>
+          <p:nvSpPr>
+            <p:cNvPr id="17" name="Textfeld 16">
+              <a:extLst>
+                <a:ext uri="{FF2B5EF4-FFF2-40B4-BE49-F238E27FC236}">
+                  <a16:creationId xmlns:a16="http://schemas.microsoft.com/office/drawing/2014/main" id="{37C877EE-6AD9-6E92-4728-A5F0983BDEF1}"/>
+                </a:ext>
+              </a:extLst>
+            </p:cNvPr>
+            <p:cNvSpPr txBox="1"/>
+            <p:nvPr/>
+          </p:nvSpPr>
+          <p:spPr>
+            <a:xfrm>
+              <a:off x="1590096" y="628736"/>
+              <a:ext cx="2172786" cy="279988"/>
+            </a:xfrm>
+            <a:prstGeom prst="rect">
+              <a:avLst/>
+            </a:prstGeom>
+            <a:grpFill/>
+          </p:spPr>
+          <p:txBody>
+            <a:bodyPr wrap="square" lIns="0" tIns="0" rIns="0" bIns="0" rtlCol="0">
+              <a:spAutoFit/>
+            </a:bodyPr>
+            <a:lstStyle/>
+            <a:p>
+              <a:pPr algn="r"/>
+              <a:r>
+                <a:rPr lang="de-DE" sz="900" dirty="0"/>
+                <a:t>Interpretation</a:t>
+              </a:r>
+            </a:p>
+          </p:txBody>
+        </p:sp>
+        <p:sp>
+          <p:nvSpPr>
+            <p:cNvPr id="19" name="Textfeld 18">
+              <a:extLst>
+                <a:ext uri="{FF2B5EF4-FFF2-40B4-BE49-F238E27FC236}">
+                  <a16:creationId xmlns:a16="http://schemas.microsoft.com/office/drawing/2014/main" id="{AA1E1B2D-3D4E-1B88-DFE4-9BE64EED2FB5}"/>
+                </a:ext>
+              </a:extLst>
+            </p:cNvPr>
+            <p:cNvSpPr txBox="1"/>
+            <p:nvPr/>
+          </p:nvSpPr>
+          <p:spPr>
+            <a:xfrm>
+              <a:off x="8518660" y="2785212"/>
+              <a:ext cx="2153288" cy="279988"/>
+            </a:xfrm>
+            <a:prstGeom prst="rect">
+              <a:avLst/>
+            </a:prstGeom>
+            <a:grpFill/>
+          </p:spPr>
+          <p:txBody>
+            <a:bodyPr wrap="square" lIns="0" tIns="0" rIns="0" bIns="0" rtlCol="0">
+              <a:spAutoFit/>
+            </a:bodyPr>
+            <a:lstStyle/>
+            <a:p>
+              <a:r>
+                <a:rPr lang="de-DE" sz="900" dirty="0"/>
+                <a:t>Measurement</a:t>
+              </a:r>
+            </a:p>
+          </p:txBody>
+        </p:sp>
+        <p:sp>
+          <p:nvSpPr>
+            <p:cNvPr id="24" name="Textfeld 23">
+              <a:extLst>
+                <a:ext uri="{FF2B5EF4-FFF2-40B4-BE49-F238E27FC236}">
+                  <a16:creationId xmlns:a16="http://schemas.microsoft.com/office/drawing/2014/main" id="{FEF5B7E5-5FC1-9BC2-35D0-704A592EC545}"/>
+                </a:ext>
+              </a:extLst>
+            </p:cNvPr>
+            <p:cNvSpPr txBox="1"/>
+            <p:nvPr/>
+          </p:nvSpPr>
+          <p:spPr>
+            <a:xfrm>
+              <a:off x="5240317" y="2785212"/>
+              <a:ext cx="2237449" cy="279988"/>
+            </a:xfrm>
+            <a:prstGeom prst="rect">
+              <a:avLst/>
+            </a:prstGeom>
+            <a:grpFill/>
+          </p:spPr>
+          <p:txBody>
+            <a:bodyPr wrap="square" lIns="0" tIns="0" rIns="0" bIns="0" rtlCol="0">
+              <a:spAutoFit/>
+            </a:bodyPr>
+            <a:lstStyle/>
+            <a:p>
+              <a:r>
+                <a:rPr lang="de-DE" sz="900" dirty="0"/>
+                <a:t>Monitoring</a:t>
+              </a:r>
+            </a:p>
+          </p:txBody>
+        </p:sp>
+        <p:sp>
+          <p:nvSpPr>
+            <p:cNvPr id="25" name="Pfeil: nach unten 24">
+              <a:extLst>
+                <a:ext uri="{FF2B5EF4-FFF2-40B4-BE49-F238E27FC236}">
+                  <a16:creationId xmlns:a16="http://schemas.microsoft.com/office/drawing/2014/main" id="{181791C0-6BA0-40AD-D369-4A3928C0173B}"/>
+                </a:ext>
+              </a:extLst>
+            </p:cNvPr>
+            <p:cNvSpPr/>
+            <p:nvPr/>
+          </p:nvSpPr>
+          <p:spPr>
+            <a:xfrm>
+              <a:off x="6398340" y="4229766"/>
+              <a:ext cx="220975" cy="417022"/>
+            </a:xfrm>
+            <a:prstGeom prst="downArrow">
+              <a:avLst/>
+            </a:prstGeom>
+            <a:grpFill/>
+            <a:ln/>
+          </p:spPr>
+          <p:style>
+            <a:lnRef idx="2">
+              <a:schemeClr val="accent4"/>
+            </a:lnRef>
+            <a:fillRef idx="1">
+              <a:schemeClr val="lt1"/>
+            </a:fillRef>
+            <a:effectRef idx="0">
+              <a:schemeClr val="accent4"/>
+            </a:effectRef>
+            <a:fontRef idx="minor">
+              <a:schemeClr val="dk1"/>
+            </a:fontRef>
+          </p:style>
+          <p:txBody>
+            <a:bodyPr rtlCol="0" anchor="ctr"/>
+            <a:lstStyle/>
+            <a:p>
+              <a:pPr algn="ctr"/>
+              <a:endParaRPr lang="de-DE" sz="400">
+                <a:solidFill>
+                  <a:schemeClr val="tx1"/>
+                </a:solidFill>
+              </a:endParaRPr>
+            </a:p>
+          </p:txBody>
+        </p:sp>
+        <p:sp>
+          <p:nvSpPr>
+            <p:cNvPr id="30" name="Textfeld 29">
+              <a:extLst>
+                <a:ext uri="{FF2B5EF4-FFF2-40B4-BE49-F238E27FC236}">
+                  <a16:creationId xmlns:a16="http://schemas.microsoft.com/office/drawing/2014/main" id="{FCED72E6-3BDD-B3EA-F535-9A4A82F7C708}"/>
+                </a:ext>
+              </a:extLst>
+            </p:cNvPr>
+            <p:cNvSpPr txBox="1"/>
+            <p:nvPr/>
+          </p:nvSpPr>
+          <p:spPr>
+            <a:xfrm>
+              <a:off x="7926223" y="4423215"/>
+              <a:ext cx="2465405" cy="279988"/>
+            </a:xfrm>
+            <a:prstGeom prst="rect">
+              <a:avLst/>
+            </a:prstGeom>
+            <a:grpFill/>
+          </p:spPr>
+          <p:txBody>
+            <a:bodyPr wrap="square" lIns="0" tIns="0" rIns="0" bIns="0" rtlCol="0">
+              <a:spAutoFit/>
+            </a:bodyPr>
+            <a:lstStyle/>
+            <a:p>
+              <a:pPr algn="r"/>
+              <a:r>
+                <a:rPr lang="de-DE" sz="900"/>
+                <a:t>Implementation  </a:t>
+              </a:r>
+            </a:p>
+          </p:txBody>
+        </p:sp>
+        <p:sp>
+          <p:nvSpPr>
+            <p:cNvPr id="49" name="Pfeil: nach unten 48">
+              <a:extLst>
+                <a:ext uri="{FF2B5EF4-FFF2-40B4-BE49-F238E27FC236}">
+                  <a16:creationId xmlns:a16="http://schemas.microsoft.com/office/drawing/2014/main" id="{9FC176FA-C461-A229-0917-23235CE48B2B}"/>
+                </a:ext>
+              </a:extLst>
+            </p:cNvPr>
+            <p:cNvSpPr/>
+            <p:nvPr/>
+          </p:nvSpPr>
+          <p:spPr>
+            <a:xfrm rot="16200000">
+              <a:off x="7657604" y="4889610"/>
+              <a:ext cx="220975" cy="417022"/>
+            </a:xfrm>
+            <a:prstGeom prst="downArrow">
+              <a:avLst/>
+            </a:prstGeom>
+            <a:grpFill/>
+            <a:ln/>
+          </p:spPr>
+          <p:style>
+            <a:lnRef idx="2">
+              <a:schemeClr val="accent4"/>
+            </a:lnRef>
+            <a:fillRef idx="1">
+              <a:schemeClr val="lt1"/>
+            </a:fillRef>
+            <a:effectRef idx="0">
+              <a:schemeClr val="accent4"/>
+            </a:effectRef>
+            <a:fontRef idx="minor">
+              <a:schemeClr val="dk1"/>
+            </a:fontRef>
+          </p:style>
+          <p:txBody>
+            <a:bodyPr rtlCol="0" anchor="ctr"/>
+            <a:lstStyle/>
+            <a:p>
+              <a:pPr algn="ctr"/>
+              <a:endParaRPr lang="de-DE" sz="400">
+                <a:solidFill>
+                  <a:schemeClr val="tx1"/>
+                </a:solidFill>
+              </a:endParaRPr>
+            </a:p>
+          </p:txBody>
+        </p:sp>
+        <p:sp>
+          <p:nvSpPr>
+            <p:cNvPr id="50" name="Zylinder 49">
+              <a:extLst>
+                <a:ext uri="{FF2B5EF4-FFF2-40B4-BE49-F238E27FC236}">
+                  <a16:creationId xmlns:a16="http://schemas.microsoft.com/office/drawing/2014/main" id="{8964A1DC-EDEA-7A4C-4CB0-DE1E8E9D71A6}"/>
+                </a:ext>
+              </a:extLst>
+            </p:cNvPr>
+            <p:cNvSpPr/>
+            <p:nvPr/>
+          </p:nvSpPr>
+          <p:spPr>
+            <a:xfrm>
+              <a:off x="3694008" y="3669315"/>
+              <a:ext cx="1534230" cy="570807"/>
+            </a:xfrm>
+            <a:prstGeom prst="can">
+              <a:avLst/>
+            </a:prstGeom>
+            <a:grpFill/>
+            <a:ln/>
+          </p:spPr>
+          <p:style>
+            <a:lnRef idx="2">
+              <a:schemeClr val="accent1"/>
+            </a:lnRef>
+            <a:fillRef idx="1">
+              <a:schemeClr val="lt1"/>
+            </a:fillRef>
+            <a:effectRef idx="0">
+              <a:schemeClr val="accent1"/>
+            </a:effectRef>
+            <a:fontRef idx="minor">
+              <a:schemeClr val="dk1"/>
+            </a:fontRef>
+          </p:style>
+          <p:txBody>
+            <a:bodyPr lIns="0" tIns="0" rIns="0" bIns="0" rtlCol="0" anchor="ctr"/>
+            <a:lstStyle/>
+            <a:p>
+              <a:pPr algn="ctr"/>
+              <a:r>
+                <a:rPr lang="de-DE" sz="800" dirty="0" err="1"/>
+                <a:t>RunningDS</a:t>
+              </a:r>
+              <a:endParaRPr lang="de-DE" sz="800" dirty="0">
+                <a:solidFill>
+                  <a:schemeClr val="tx1"/>
+                </a:solidFill>
+              </a:endParaRPr>
+            </a:p>
+          </p:txBody>
+        </p:sp>
+        <p:sp>
+          <p:nvSpPr>
+            <p:cNvPr id="51" name="Textfeld 50">
+              <a:extLst>
+                <a:ext uri="{FF2B5EF4-FFF2-40B4-BE49-F238E27FC236}">
+                  <a16:creationId xmlns:a16="http://schemas.microsoft.com/office/drawing/2014/main" id="{213C8B79-1A9D-F4F1-BA7D-F72B54500590}"/>
+                </a:ext>
+              </a:extLst>
+            </p:cNvPr>
+            <p:cNvSpPr txBox="1"/>
+            <p:nvPr/>
+          </p:nvSpPr>
+          <p:spPr>
+            <a:xfrm>
+              <a:off x="2314962" y="2861284"/>
+              <a:ext cx="2256933" cy="279988"/>
+            </a:xfrm>
+            <a:prstGeom prst="rect">
+              <a:avLst/>
+            </a:prstGeom>
+            <a:grpFill/>
+          </p:spPr>
+          <p:txBody>
+            <a:bodyPr wrap="square" lIns="0" tIns="0" rIns="0" bIns="0" rtlCol="0">
+              <a:spAutoFit/>
+            </a:bodyPr>
+            <a:lstStyle/>
+            <a:p>
+              <a:r>
+                <a:rPr lang="de-DE" sz="900"/>
+                <a:t>Validation</a:t>
+              </a:r>
+            </a:p>
+          </p:txBody>
+        </p:sp>
+      </p:grpSp>
+      <p:sp>
+        <p:nvSpPr>
+          <p:cNvPr id="65" name="Denkblase: wolkenförmig 64">
+            <a:extLst>
+              <a:ext uri="{FF2B5EF4-FFF2-40B4-BE49-F238E27FC236}">
+                <a16:creationId xmlns:a16="http://schemas.microsoft.com/office/drawing/2014/main" id="{2219123D-C149-E710-3327-B1A7C719EF5E}"/>
+              </a:ext>
+            </a:extLst>
+          </p:cNvPr>
+          <p:cNvSpPr/>
+          <p:nvPr/>
+        </p:nvSpPr>
+        <p:spPr>
+          <a:xfrm>
             <a:off x="9535636" y="5712618"/>
             <a:ext cx="2274936" cy="774700"/>
           </a:xfrm>
@@ -8503,7 +11893,7 @@
 </p:sld>
 </file>
 
-<file path=ppt/slides/slide3.xml><?xml version="1.0" encoding="utf-8"?>
+<file path=ppt/slides/slide4.xml><?xml version="1.0" encoding="utf-8"?>
 <p:sld xmlns:a="http://schemas.openxmlformats.org/drawingml/2006/main" xmlns:r="http://schemas.openxmlformats.org/officeDocument/2006/relationships" xmlns:p="http://schemas.openxmlformats.org/presentationml/2006/main">
   <p:cSld>
     <p:spTree>
